--- a/docs/管理者操作手冊_論憶.pptx
+++ b/docs/管理者操作手冊_論憶.pptx
@@ -128,18 +128,18 @@
   <p:extLst>
     <p:ext uri="{521415D9-36F7-43E2-AB2F-B90AF26B5E84}">
       <p14:sectionLst xmlns:p14="http://schemas.microsoft.com/office/powerpoint/2010/main">
-        <p14:section name="封面" id="{89aa473a-a67b-9de2-9b24-55b80794a701}">
+        <p14:section name="封面" id="{2cf397cb-dcc8-5f08-569c-71c043b29279}">
           <p14:sldIdLst>
             <p14:sldId id="256"/>
           </p14:sldIdLst>
         </p14:section>
-        <p14:section name="開始之前" id="{0eeeff49-739e-5423-adb5-b232ea8db829}">
+        <p14:section name="開始之前" id="{f0547504-9a24-159d-1472-e60b93146880}">
           <p14:sldIdLst>
             <p14:sldId id="257"/>
             <p14:sldId id="258"/>
           </p14:sldIdLst>
         </p14:section>
-        <p14:section name="A. 開放 Google 登入" id="{f49d12d5-efff-5d0f-e3dc-f93070e5cc8a}">
+        <p14:section name="A. 開放 Google 登入" id="{b58c3ed2-a5b0-b633-45a8-e9c078192a2d}">
           <p14:sldIdLst>
             <p14:sldId id="259"/>
             <p14:sldId id="260"/>
@@ -150,7 +150,7 @@
             <p14:sldId id="265"/>
           </p14:sldIdLst>
         </p14:section>
-        <p14:section name="B. 用 Claude（Max 額度）" id="{7bf938ab-7e01-da63-90cb-c23d6336ee75}">
+        <p14:section name="B. 用 Claude（Max 額度）" id="{bae3ad1e-570f-edb0-6176-0a1f8de06b12}">
           <p14:sldIdLst>
             <p14:sldId id="266"/>
             <p14:sldId id="267"/>
@@ -163,12 +163,12 @@
             <p14:sldId id="274"/>
           </p14:sldIdLst>
         </p14:section>
-        <p14:section name="C. 改用免費的 Gemini" id="{2093870d-b8d3-1d53-a884-f2bf2f208255}">
+        <p14:section name="C. 改用免費的 Gemini" id="{18e850b7-fe9a-1fae-55a0-7f04407b0cbc}">
           <p14:sldIdLst>
             <p14:sldId id="275"/>
           </p14:sldIdLst>
         </p14:section>
-        <p14:section name="問題與檢查" id="{e83d7e26-85cd-9f19-4b1a-e40309cd8f65}">
+        <p14:section name="問題與檢查" id="{03cb5a20-d541-4bcd-f064-881a4baa6cc8}">
           <p14:sldIdLst>
             <p14:sldId id="276"/>
             <p14:sldId id="277"/>
@@ -930,7 +930,7 @@
           <a:p>
             <a:r>
               <a:rPr lang="en-US" dirty="0"/>
-              <a:t>在 API keys 建立金鑰，工作區一定要選 lunyi，否則會被拒絕。期限建議選 Never。金鑰只顯示一次，複製後接法 1 貼進論憶，接法 2 貼到 Vercel。</a:t>
+              <a:t>在 API keys 建立金鑰；如果跳出建議改用身分聯盟的視窗，按使用 API 金鑰繼續，那是給雲端伺服器用的。工作區一定要選 lunyi，否則會被拒絕。期限建議選 Never。金鑰只顯示一次，複製後接法 1 貼進論憶，接法 2 貼到 Vercel。</a:t>
             </a:r>
             <a:endParaRPr lang="en-US" dirty="0"/>
           </a:p>
@@ -9127,7 +9127,7 @@
         <p:spPr>
           <a:xfrm>
             <a:off x="7854696" y="1463040"/>
-            <a:ext cx="3788359" cy="252984"/>
+            <a:ext cx="3788359" cy="244602"/>
           </a:xfrm>
           <a:prstGeom prst="rect">
             <a:avLst/>
@@ -9143,14 +9143,14 @@
               <a:buNone/>
             </a:pPr>
             <a:r>
-              <a:rPr lang="zh-TW" altLang="en-US" sz="1400" b="1" dirty="0">
+              <a:rPr lang="zh-TW" altLang="en-US" sz="1350" b="1" dirty="0">
                 <a:solidFill>
                   <a:schemeClr val="tx1"/>
                 </a:solidFill>
               </a:rPr>
               <a:t>API keys → Create key</a:t>
             </a:r>
-            <a:endParaRPr lang="zh-TW" sz="1400" dirty="0"/>
+            <a:endParaRPr lang="zh-TW" sz="1350" dirty="0"/>
           </a:p>
         </p:txBody>
       </p:sp>
@@ -9162,8 +9162,8 @@
         </p:nvSpPr>
         <p:spPr>
           <a:xfrm>
-            <a:off x="7854696" y="1770888"/>
-            <a:ext cx="3788359" cy="822960"/>
+            <a:off x="7854696" y="1762506"/>
+            <a:ext cx="3788359" cy="982218"/>
           </a:xfrm>
           <a:prstGeom prst="rect">
             <a:avLst/>
@@ -9179,14 +9179,14 @@
               <a:buNone/>
             </a:pPr>
             <a:r>
-              <a:rPr lang="zh-TW" altLang="en-US" sz="1200" dirty="0">
+              <a:rPr lang="zh-TW" altLang="en-US" sz="1150" dirty="0">
                 <a:solidFill>
                   <a:schemeClr val="tx2"/>
                 </a:solidFill>
               </a:rPr>
-              <a:t>先確認 Console 在 B1 綁定的組織。接法 1 每台電腦建一把，用電腦命名（例如 lunyi-laptop）；接法 2 建一把 lunyi-vercel。Linked account 選你自己（個人金鑰）。</a:t>
-            </a:r>
-            <a:endParaRPr lang="zh-TW" sz="1200" dirty="0"/>
+              <a:t>先確認 Console 在 B1 綁定的組織。跳出「使用身分聯盟，您不需要 API 金鑰」時，按「使用 API 金鑰繼續」。接法 1 每台電腦建一把，用電腦命名（例如 lunyi-laptop）；接法 2 建一把 lunyi-vercel。Linked account 選你自己（個人金鑰）。</a:t>
+            </a:r>
+            <a:endParaRPr lang="zh-TW" sz="1150" dirty="0"/>
           </a:p>
         </p:txBody>
       </p:sp>
@@ -9198,7 +9198,7 @@
         </p:nvSpPr>
         <p:spPr>
           <a:xfrm>
-            <a:off x="7452360" y="2795016"/>
+            <a:off x="7452360" y="2918460"/>
             <a:ext cx="292608" cy="292608"/>
           </a:xfrm>
           <a:prstGeom prst="ellipse">
@@ -9223,7 +9223,7 @@
         </p:nvSpPr>
         <p:spPr>
           <a:xfrm>
-            <a:off x="7452360" y="2795016"/>
+            <a:off x="7452360" y="2918460"/>
             <a:ext cx="292608" cy="292608"/>
           </a:xfrm>
           <a:prstGeom prst="rect">
@@ -9259,8 +9259,8 @@
         </p:nvSpPr>
         <p:spPr>
           <a:xfrm>
-            <a:off x="7854696" y="2785872"/>
-            <a:ext cx="3788359" cy="252984"/>
+            <a:off x="7854696" y="2909316"/>
+            <a:ext cx="3788359" cy="244602"/>
           </a:xfrm>
           <a:prstGeom prst="rect">
             <a:avLst/>
@@ -9276,14 +9276,14 @@
               <a:buNone/>
             </a:pPr>
             <a:r>
-              <a:rPr lang="zh-TW" altLang="en-US" sz="1400" b="1" dirty="0">
+              <a:rPr lang="zh-TW" altLang="en-US" sz="1350" b="1" dirty="0">
                 <a:solidFill>
                   <a:schemeClr val="tx1"/>
                 </a:solidFill>
               </a:rPr>
               <a:t>Workspace 選 lunyi</a:t>
             </a:r>
-            <a:endParaRPr lang="zh-TW" sz="1400" dirty="0"/>
+            <a:endParaRPr lang="zh-TW" sz="1350" dirty="0"/>
           </a:p>
         </p:txBody>
       </p:sp>
@@ -9295,8 +9295,8 @@
         </p:nvSpPr>
         <p:spPr>
           <a:xfrm>
-            <a:off x="7854696" y="3093720"/>
-            <a:ext cx="3788359" cy="1024128"/>
+            <a:off x="7854696" y="3208782"/>
+            <a:ext cx="3788359" cy="789432"/>
           </a:xfrm>
           <a:prstGeom prst="rect">
             <a:avLst/>
@@ -9312,14 +9312,14 @@
               <a:buNone/>
             </a:pPr>
             <a:r>
-              <a:rPr lang="zh-TW" altLang="en-US" sz="1200" dirty="0">
+              <a:rPr lang="zh-TW" altLang="en-US" sz="1150" dirty="0">
                 <a:solidFill>
                   <a:schemeClr val="tx2"/>
                 </a:solidFill>
               </a:rPr>
               <a:t>沒選工作區的金鑰會被拒絕：接法 1 儲存時顯示「這把金鑰沒有綁定 workspace」，接法 2 顯示「not scoped to a workspace」。表單裡沒有這一欄時，先在 API keys 頁上方的工作區選單選 lunyi，再按 Create key。</a:t>
             </a:r>
-            <a:endParaRPr lang="zh-TW" sz="1200" dirty="0"/>
+            <a:endParaRPr lang="zh-TW" sz="1150" dirty="0"/>
           </a:p>
         </p:txBody>
       </p:sp>
@@ -9331,7 +9331,7 @@
         </p:nvSpPr>
         <p:spPr>
           <a:xfrm>
-            <a:off x="7452360" y="4319016"/>
+            <a:off x="7452360" y="4171950"/>
             <a:ext cx="292608" cy="292608"/>
           </a:xfrm>
           <a:prstGeom prst="ellipse">
@@ -9356,7 +9356,7 @@
         </p:nvSpPr>
         <p:spPr>
           <a:xfrm>
-            <a:off x="7452360" y="4319016"/>
+            <a:off x="7452360" y="4171950"/>
             <a:ext cx="292608" cy="292608"/>
           </a:xfrm>
           <a:prstGeom prst="rect">
@@ -9392,8 +9392,8 @@
         </p:nvSpPr>
         <p:spPr>
           <a:xfrm>
-            <a:off x="7854696" y="4309872"/>
-            <a:ext cx="3788359" cy="252984"/>
+            <a:off x="7854696" y="4162806"/>
+            <a:ext cx="3788359" cy="244602"/>
           </a:xfrm>
           <a:prstGeom prst="rect">
             <a:avLst/>
@@ -9409,14 +9409,14 @@
               <a:buNone/>
             </a:pPr>
             <a:r>
-              <a:rPr lang="zh-TW" altLang="en-US" sz="1400" b="1" dirty="0">
+              <a:rPr lang="zh-TW" altLang="en-US" sz="1350" b="1" dirty="0">
                 <a:solidFill>
                   <a:schemeClr val="tx1"/>
                 </a:solidFill>
               </a:rPr>
               <a:t>Expiration 選 Never</a:t>
             </a:r>
-            <a:endParaRPr lang="zh-TW" sz="1400" dirty="0"/>
+            <a:endParaRPr lang="zh-TW" sz="1350" dirty="0"/>
           </a:p>
         </p:txBody>
       </p:sp>
@@ -9428,8 +9428,8 @@
         </p:nvSpPr>
         <p:spPr>
           <a:xfrm>
-            <a:off x="7854696" y="4617720"/>
-            <a:ext cx="3788359" cy="420624"/>
+            <a:off x="7854696" y="4462272"/>
+            <a:ext cx="3788359" cy="403860"/>
           </a:xfrm>
           <a:prstGeom prst="rect">
             <a:avLst/>
@@ -9445,14 +9445,14 @@
               <a:buNone/>
             </a:pPr>
             <a:r>
-              <a:rPr lang="zh-TW" altLang="en-US" sz="1200" dirty="0">
+              <a:rPr lang="zh-TW" altLang="en-US" sz="1150" dirty="0">
                 <a:solidFill>
                   <a:schemeClr val="tx2"/>
                 </a:solidFill>
               </a:rPr>
               <a:t>或選長一點的期限並記下日期。到期後網站的 AI 會停止，而且期限建立後不能改。</a:t>
             </a:r>
-            <a:endParaRPr lang="zh-TW" sz="1200" dirty="0"/>
+            <a:endParaRPr lang="zh-TW" sz="1150" dirty="0"/>
           </a:p>
         </p:txBody>
       </p:sp>
@@ -9464,7 +9464,7 @@
         </p:nvSpPr>
         <p:spPr>
           <a:xfrm>
-            <a:off x="7452360" y="5239512"/>
+            <a:off x="7452360" y="5039868"/>
             <a:ext cx="292608" cy="292608"/>
           </a:xfrm>
           <a:prstGeom prst="ellipse">
@@ -9489,7 +9489,7 @@
         </p:nvSpPr>
         <p:spPr>
           <a:xfrm>
-            <a:off x="7452360" y="5239512"/>
+            <a:off x="7452360" y="5039868"/>
             <a:ext cx="292608" cy="292608"/>
           </a:xfrm>
           <a:prstGeom prst="rect">
@@ -9525,8 +9525,8 @@
         </p:nvSpPr>
         <p:spPr>
           <a:xfrm>
-            <a:off x="7854696" y="5230368"/>
-            <a:ext cx="3788359" cy="252984"/>
+            <a:off x="7854696" y="5030724"/>
+            <a:ext cx="3788359" cy="244602"/>
           </a:xfrm>
           <a:prstGeom prst="rect">
             <a:avLst/>
@@ -9542,14 +9542,14 @@
               <a:buNone/>
             </a:pPr>
             <a:r>
-              <a:rPr lang="zh-TW" altLang="en-US" sz="1400" b="1" dirty="0">
+              <a:rPr lang="zh-TW" altLang="en-US" sz="1350" b="1" dirty="0">
                 <a:solidFill>
                   <a:schemeClr val="tx1"/>
                 </a:solidFill>
               </a:rPr>
               <a:t>立刻複製 sk-ant- 開頭的金鑰</a:t>
             </a:r>
-            <a:endParaRPr lang="zh-TW" sz="1400" dirty="0"/>
+            <a:endParaRPr lang="zh-TW" sz="1350" dirty="0"/>
           </a:p>
         </p:txBody>
       </p:sp>
@@ -9561,8 +9561,8 @@
         </p:nvSpPr>
         <p:spPr>
           <a:xfrm>
-            <a:off x="7854696" y="5538216"/>
-            <a:ext cx="3788359" cy="420624"/>
+            <a:off x="7854696" y="5330190"/>
+            <a:ext cx="3788359" cy="403860"/>
           </a:xfrm>
           <a:prstGeom prst="rect">
             <a:avLst/>
@@ -9578,14 +9578,14 @@
               <a:buNone/>
             </a:pPr>
             <a:r>
-              <a:rPr lang="zh-TW" altLang="en-US" sz="1200" dirty="0">
+              <a:rPr lang="zh-TW" altLang="en-US" sz="1150" dirty="0">
                 <a:solidFill>
                   <a:schemeClr val="tx2"/>
                 </a:solidFill>
               </a:rPr>
               <a:t>只會顯示這一次。接法 1 貼進論憶（下一頁），接法 2 貼到 Vercel（B3）；弄丟了就刪掉重建一把。</a:t>
             </a:r>
-            <a:endParaRPr lang="zh-TW" sz="1200" dirty="0"/>
+            <a:endParaRPr lang="zh-TW" sz="1150" dirty="0"/>
           </a:p>
         </p:txBody>
       </p:sp>
@@ -19706,7 +19706,7 @@
                   <a:schemeClr val="tx2"/>
                 </a:solidFill>
               </a:rPr>
-              <a:t>外部網站要登入才看得到，所以畫成示意圖。Google Cloud 可能是中文或英文介面，兩種名稱都列出；Claude Console、Vercel、AI Studio 是英文介面。</a:t>
+              <a:t>外部網站要登入才看得到，所以畫成示意圖。Google Cloud 可能是中文或英文介面，兩種名稱都列出；Claude Console 可能是中文或英文介面（以英文按鈕名稱為準）；Vercel、AI Studio 是英文介面。</a:t>
             </a:r>
             <a:endParaRPr lang="zh-TW" sz="1100" dirty="0"/>
           </a:p>

--- a/docs/管理者操作手冊_論憶.pptx
+++ b/docs/管理者操作手冊_論憶.pptx
@@ -128,18 +128,18 @@
   <p:extLst>
     <p:ext uri="{521415D9-36F7-43E2-AB2F-B90AF26B5E84}">
       <p14:sectionLst xmlns:p14="http://schemas.microsoft.com/office/powerpoint/2010/main">
-        <p14:section name="封面" id="{2cf397cb-dcc8-5f08-569c-71c043b29279}">
+        <p14:section name="封面" id="{0bdcc61f-2631-bbf3-f3a5-ffcb79d63b57}">
           <p14:sldIdLst>
             <p14:sldId id="256"/>
           </p14:sldIdLst>
         </p14:section>
-        <p14:section name="開始之前" id="{f0547504-9a24-159d-1472-e60b93146880}">
+        <p14:section name="開始之前" id="{a3f033a5-45ec-479b-2db6-515767954876}">
           <p14:sldIdLst>
             <p14:sldId id="257"/>
             <p14:sldId id="258"/>
           </p14:sldIdLst>
         </p14:section>
-        <p14:section name="A. 開放 Google 登入" id="{b58c3ed2-a5b0-b633-45a8-e9c078192a2d}">
+        <p14:section name="A. 開放 Google 登入" id="{800ba872-a238-de38-ce23-65a42e5e37aa}">
           <p14:sldIdLst>
             <p14:sldId id="259"/>
             <p14:sldId id="260"/>
@@ -150,7 +150,7 @@
             <p14:sldId id="265"/>
           </p14:sldIdLst>
         </p14:section>
-        <p14:section name="B. 用 Claude（Max 額度）" id="{bae3ad1e-570f-edb0-6176-0a1f8de06b12}">
+        <p14:section name="B. 用 Claude（Max 額度）" id="{9eb48a6a-801d-ba54-4514-5d29ccddd704}">
           <p14:sldIdLst>
             <p14:sldId id="266"/>
             <p14:sldId id="267"/>
@@ -163,12 +163,12 @@
             <p14:sldId id="274"/>
           </p14:sldIdLst>
         </p14:section>
-        <p14:section name="C. 改用免費的 Gemini" id="{18e850b7-fe9a-1fae-55a0-7f04407b0cbc}">
+        <p14:section name="C. 改用免費的 Gemini" id="{67551af5-b165-aa8a-87dc-06315dd15814}">
           <p14:sldIdLst>
             <p14:sldId id="275"/>
           </p14:sldIdLst>
         </p14:section>
-        <p14:section name="問題與檢查" id="{03cb5a20-d541-4bcd-f064-881a4baa6cc8}">
+        <p14:section name="問題與檢查" id="{4f85c0d6-2216-aaad-67a8-9b81423d6cb7}">
           <p14:sldIdLst>
             <p14:sldId id="276"/>
             <p14:sldId id="277"/>
@@ -930,7 +930,7 @@
           <a:p>
             <a:r>
               <a:rPr lang="en-US" dirty="0"/>
-              <a:t>在 API keys 建立金鑰；如果跳出建議改用身分聯盟的視窗，按使用 API 金鑰繼續，那是給雲端伺服器用的。工作區一定要選 lunyi，否則會被拒絕。期限建議選 Never。金鑰只顯示一次，複製後接法 1 貼進論憶，接法 2 貼到 Vercel。</a:t>
+              <a:t>到金鑰與存取權的 API 金鑰頁建立金鑰。如果跳出建議改用身分聯盟的視窗，按使用 API 金鑰繼續，那是給雲端伺服器用的。名稱用電腦命名，到期時間選永不，範圍選 lunyi，沒建 lunyi 的話預設工作區也能用。金鑰只顯示一次，複製後接法 1 貼進論憶，接法 2 貼到 Vercel；不要貼進對話或程式。</a:t>
             </a:r>
             <a:endParaRPr lang="en-US" dirty="0"/>
           </a:p>
@@ -7706,7 +7706,7 @@
                   <a:schemeClr val="tx1"/>
                 </a:solidFill>
               </a:rPr>
-              <a:t>建立金鑰：一定要選工作區 lunyi</a:t>
+              <a:t>建立金鑰：範圍選一個工作區，期限選「永不」</a:t>
             </a:r>
             <a:endParaRPr lang="zh-TW" sz="2800" dirty="0"/>
           </a:p>
@@ -7914,157 +7914,13 @@
       </p:sp>
       <p:sp>
         <p:nvSpPr>
-          <p:cNvPr id="12" name="Text 10"/>
-          <p:cNvSpPr txBox="1"/>
-          <p:nvPr/>
-        </p:nvSpPr>
-        <p:spPr>
-          <a:xfrm>
-            <a:off x="713232" y="1984248"/>
-            <a:ext cx="1508760" cy="292608"/>
-          </a:xfrm>
-          <a:prstGeom prst="rect">
-            <a:avLst/>
-          </a:prstGeom>
-          <a:noFill/>
-          <a:ln/>
-        </p:spPr>
-        <p:txBody>
-          <a:bodyPr wrap="square" lIns="0" tIns="0" rIns="0" bIns="0" rtlCol="0" anchor="ctr"/>
-          <a:lstStyle/>
-          <a:p>
-            <a:pPr indent="0" marL="0">
-              <a:buNone/>
-            </a:pPr>
-            <a:r>
-              <a:rPr lang="zh-TW" altLang="en-US" sz="1000" dirty="0">
-                <a:solidFill>
-                  <a:schemeClr val="tx1"/>
-                </a:solidFill>
-              </a:rPr>
-              <a:t>Usage</a:t>
-            </a:r>
-            <a:endParaRPr lang="zh-TW" sz="1000" dirty="0"/>
-          </a:p>
-        </p:txBody>
-      </p:sp>
-      <p:sp>
-        <p:nvSpPr>
-          <p:cNvPr id="13" name="Text 11"/>
-          <p:cNvSpPr txBox="1"/>
-          <p:nvPr/>
-        </p:nvSpPr>
-        <p:spPr>
-          <a:xfrm>
-            <a:off x="713232" y="2331720"/>
-            <a:ext cx="1508760" cy="292608"/>
-          </a:xfrm>
-          <a:prstGeom prst="rect">
-            <a:avLst/>
-          </a:prstGeom>
-          <a:noFill/>
-          <a:ln/>
-        </p:spPr>
-        <p:txBody>
-          <a:bodyPr wrap="square" lIns="0" tIns="0" rIns="0" bIns="0" rtlCol="0" anchor="ctr"/>
-          <a:lstStyle/>
-          <a:p>
-            <a:pPr indent="0" marL="0">
-              <a:buNone/>
-            </a:pPr>
-            <a:r>
-              <a:rPr lang="zh-TW" altLang="en-US" sz="1000" dirty="0">
-                <a:solidFill>
-                  <a:schemeClr val="tx1"/>
-                </a:solidFill>
-              </a:rPr>
-              <a:t>Cost</a:t>
-            </a:r>
-            <a:endParaRPr lang="zh-TW" sz="1000" dirty="0"/>
-          </a:p>
-        </p:txBody>
-      </p:sp>
-      <p:sp>
-        <p:nvSpPr>
-          <p:cNvPr id="14" name="Text 12"/>
-          <p:cNvSpPr txBox="1"/>
-          <p:nvPr/>
-        </p:nvSpPr>
-        <p:spPr>
-          <a:xfrm>
-            <a:off x="713232" y="2679192"/>
-            <a:ext cx="1508760" cy="292608"/>
-          </a:xfrm>
-          <a:prstGeom prst="rect">
-            <a:avLst/>
-          </a:prstGeom>
-          <a:noFill/>
-          <a:ln/>
-        </p:spPr>
-        <p:txBody>
-          <a:bodyPr wrap="square" lIns="0" tIns="0" rIns="0" bIns="0" rtlCol="0" anchor="ctr"/>
-          <a:lstStyle/>
-          <a:p>
-            <a:pPr indent="0" marL="0">
-              <a:buNone/>
-            </a:pPr>
-            <a:r>
-              <a:rPr lang="zh-TW" altLang="en-US" sz="1000" dirty="0">
-                <a:solidFill>
-                  <a:schemeClr val="tx1"/>
-                </a:solidFill>
-              </a:rPr>
-              <a:t>Billing</a:t>
-            </a:r>
-            <a:endParaRPr lang="zh-TW" sz="1000" dirty="0"/>
-          </a:p>
-        </p:txBody>
-      </p:sp>
-      <p:sp>
-        <p:nvSpPr>
-          <p:cNvPr id="15" name="Text 13"/>
-          <p:cNvSpPr txBox="1"/>
-          <p:nvPr/>
-        </p:nvSpPr>
-        <p:spPr>
-          <a:xfrm>
-            <a:off x="713232" y="3026664"/>
-            <a:ext cx="1508760" cy="292608"/>
-          </a:xfrm>
-          <a:prstGeom prst="rect">
-            <a:avLst/>
-          </a:prstGeom>
-          <a:noFill/>
-          <a:ln/>
-        </p:spPr>
-        <p:txBody>
-          <a:bodyPr wrap="square" lIns="0" tIns="0" rIns="0" bIns="0" rtlCol="0" anchor="ctr"/>
-          <a:lstStyle/>
-          <a:p>
-            <a:pPr indent="0" marL="0">
-              <a:buNone/>
-            </a:pPr>
-            <a:r>
-              <a:rPr lang="zh-TW" altLang="en-US" sz="1000" dirty="0">
-                <a:solidFill>
-                  <a:schemeClr val="tx1"/>
-                </a:solidFill>
-              </a:rPr>
-              <a:t>Workspaces</a:t>
-            </a:r>
-            <a:endParaRPr lang="zh-TW" sz="1000" dirty="0"/>
-          </a:p>
-        </p:txBody>
-      </p:sp>
-      <p:sp>
-        <p:nvSpPr>
-          <p:cNvPr id="16" name="Shape 14"/>
+          <p:cNvPr id="12" name="Shape 10"/>
           <p:cNvSpPr/>
           <p:nvPr/>
         </p:nvSpPr>
         <p:spPr>
           <a:xfrm>
-            <a:off x="640080" y="3374136"/>
+            <a:off x="640080" y="1984248"/>
             <a:ext cx="1600200" cy="292608"/>
           </a:xfrm>
           <a:prstGeom prst="roundRect">
@@ -8085,13 +7941,13 @@
       </p:sp>
       <p:sp>
         <p:nvSpPr>
-          <p:cNvPr id="17" name="Text 15"/>
-          <p:cNvSpPr txBox="1"/>
-          <p:nvPr/>
-        </p:nvSpPr>
-        <p:spPr>
-          <a:xfrm>
-            <a:off x="713232" y="3374136"/>
+          <p:cNvPr id="13" name="Text 11"/>
+          <p:cNvSpPr txBox="1"/>
+          <p:nvPr/>
+        </p:nvSpPr>
+        <p:spPr>
+          <a:xfrm>
+            <a:off x="713232" y="1984248"/>
             <a:ext cx="1508760" cy="292608"/>
           </a:xfrm>
           <a:prstGeom prst="rect">
@@ -8113,7 +7969,7 @@
                   <a:schemeClr val="accent1"/>
                 </a:solidFill>
               </a:rPr>
-              <a:t>API keys</a:t>
+              <a:t>API 金鑰</a:t>
             </a:r>
             <a:endParaRPr lang="zh-TW" sz="1000" dirty="0"/>
           </a:p>
@@ -8121,7 +7977,79 @@
       </p:sp>
       <p:sp>
         <p:nvSpPr>
-          <p:cNvPr id="18" name="tag-mock"/>
+          <p:cNvPr id="14" name="Text 12"/>
+          <p:cNvSpPr txBox="1"/>
+          <p:nvPr/>
+        </p:nvSpPr>
+        <p:spPr>
+          <a:xfrm>
+            <a:off x="713232" y="2331720"/>
+            <a:ext cx="1508760" cy="292608"/>
+          </a:xfrm>
+          <a:prstGeom prst="rect">
+            <a:avLst/>
+          </a:prstGeom>
+          <a:noFill/>
+          <a:ln/>
+        </p:spPr>
+        <p:txBody>
+          <a:bodyPr wrap="square" lIns="0" tIns="0" rIns="0" bIns="0" rtlCol="0" anchor="ctr"/>
+          <a:lstStyle/>
+          <a:p>
+            <a:pPr indent="0" marL="0">
+              <a:buNone/>
+            </a:pPr>
+            <a:r>
+              <a:rPr lang="zh-TW" altLang="en-US" sz="1000" dirty="0">
+                <a:solidFill>
+                  <a:schemeClr val="tx1"/>
+                </a:solidFill>
+              </a:rPr>
+              <a:t>服務帳戶</a:t>
+            </a:r>
+            <a:endParaRPr lang="zh-TW" sz="1000" dirty="0"/>
+          </a:p>
+        </p:txBody>
+      </p:sp>
+      <p:sp>
+        <p:nvSpPr>
+          <p:cNvPr id="15" name="Text 13"/>
+          <p:cNvSpPr txBox="1"/>
+          <p:nvPr/>
+        </p:nvSpPr>
+        <p:spPr>
+          <a:xfrm>
+            <a:off x="713232" y="2679192"/>
+            <a:ext cx="1508760" cy="292608"/>
+          </a:xfrm>
+          <a:prstGeom prst="rect">
+            <a:avLst/>
+          </a:prstGeom>
+          <a:noFill/>
+          <a:ln/>
+        </p:spPr>
+        <p:txBody>
+          <a:bodyPr wrap="square" lIns="0" tIns="0" rIns="0" bIns="0" rtlCol="0" anchor="ctr"/>
+          <a:lstStyle/>
+          <a:p>
+            <a:pPr indent="0" marL="0">
+              <a:buNone/>
+            </a:pPr>
+            <a:r>
+              <a:rPr lang="zh-TW" altLang="en-US" sz="1000" dirty="0">
+                <a:solidFill>
+                  <a:schemeClr val="tx1"/>
+                </a:solidFill>
+              </a:rPr>
+              <a:t>工作負載身分</a:t>
+            </a:r>
+            <a:endParaRPr lang="zh-TW" sz="1000" dirty="0"/>
+          </a:p>
+        </p:txBody>
+      </p:sp>
+      <p:sp>
+        <p:nvSpPr>
+          <p:cNvPr id="16" name="tag-mock"/>
           <p:cNvSpPr/>
           <p:nvPr/>
         </p:nvSpPr>
@@ -8148,7 +8076,7 @@
       </p:sp>
       <p:sp>
         <p:nvSpPr>
-          <p:cNvPr id="19" name="Text 17"/>
+          <p:cNvPr id="17" name="Text 15"/>
           <p:cNvSpPr txBox="1"/>
           <p:nvPr/>
         </p:nvSpPr>
@@ -8184,14 +8112,693 @@
       </p:sp>
       <p:sp>
         <p:nvSpPr>
+          <p:cNvPr id="18" name="Text 16"/>
+          <p:cNvSpPr txBox="1"/>
+          <p:nvPr/>
+        </p:nvSpPr>
+        <p:spPr>
+          <a:xfrm>
+            <a:off x="2560320" y="2011680"/>
+            <a:ext cx="4389120" cy="329184"/>
+          </a:xfrm>
+          <a:prstGeom prst="rect">
+            <a:avLst/>
+          </a:prstGeom>
+          <a:noFill/>
+          <a:ln/>
+        </p:spPr>
+        <p:txBody>
+          <a:bodyPr wrap="square" lIns="0" tIns="0" rIns="0" bIns="0" rtlCol="0" anchor="ctr"/>
+          <a:lstStyle/>
+          <a:p>
+            <a:pPr indent="0" marL="0">
+              <a:buNone/>
+            </a:pPr>
+            <a:r>
+              <a:rPr lang="zh-TW" altLang="en-US" sz="1500" b="1" dirty="0">
+                <a:solidFill>
+                  <a:schemeClr val="tx1"/>
+                </a:solidFill>
+              </a:rPr>
+              <a:t>建立 API 金鑰</a:t>
+            </a:r>
+            <a:endParaRPr lang="zh-TW" sz="1500" dirty="0"/>
+          </a:p>
+        </p:txBody>
+      </p:sp>
+      <p:sp>
+        <p:nvSpPr>
+          <p:cNvPr id="19" name="Text 17"/>
+          <p:cNvSpPr txBox="1"/>
+          <p:nvPr/>
+        </p:nvSpPr>
+        <p:spPr>
+          <a:xfrm>
+            <a:off x="2560320" y="2414016"/>
+            <a:ext cx="4389120" cy="201168"/>
+          </a:xfrm>
+          <a:prstGeom prst="rect">
+            <a:avLst/>
+          </a:prstGeom>
+          <a:noFill/>
+          <a:ln/>
+        </p:spPr>
+        <p:txBody>
+          <a:bodyPr wrap="square" lIns="0" tIns="0" rIns="0" bIns="0" rtlCol="0" anchor="ctr"/>
+          <a:lstStyle/>
+          <a:p>
+            <a:pPr indent="0" marL="0">
+              <a:buNone/>
+            </a:pPr>
+            <a:r>
+              <a:rPr lang="zh-TW" altLang="en-US" sz="1000" b="1" dirty="0">
+                <a:solidFill>
+                  <a:schemeClr val="tx1"/>
+                </a:solidFill>
+              </a:rPr>
+              <a:t>名稱</a:t>
+            </a:r>
+            <a:endParaRPr lang="zh-TW" sz="1000" dirty="0"/>
+          </a:p>
+        </p:txBody>
+      </p:sp>
+      <p:sp>
+        <p:nvSpPr>
           <p:cNvPr id="20" name="Shape 18"/>
           <p:cNvSpPr/>
           <p:nvPr/>
         </p:nvSpPr>
         <p:spPr>
           <a:xfrm>
-            <a:off x="2560320" y="2011680"/>
-            <a:ext cx="1371600" cy="310896"/>
+            <a:off x="2560320" y="2633472"/>
+            <a:ext cx="3291840" cy="310896"/>
+          </a:xfrm>
+          <a:prstGeom prst="roundRect">
+            <a:avLst>
+              <a:gd name="adj" fmla="val 11765"/>
+            </a:avLst>
+          </a:prstGeom>
+          <a:solidFill>
+            <a:schemeClr val="accent4"/>
+          </a:solidFill>
+          <a:ln w="25400">
+            <a:solidFill>
+              <a:schemeClr val="accent3"/>
+            </a:solidFill>
+            <a:prstDash val="solid"/>
+          </a:ln>
+        </p:spPr>
+      </p:sp>
+      <p:sp>
+        <p:nvSpPr>
+          <p:cNvPr id="21" name="Text 19"/>
+          <p:cNvSpPr txBox="1"/>
+          <p:nvPr/>
+        </p:nvSpPr>
+        <p:spPr>
+          <a:xfrm>
+            <a:off x="2651760" y="2633472"/>
+            <a:ext cx="3108960" cy="310896"/>
+          </a:xfrm>
+          <a:prstGeom prst="rect">
+            <a:avLst/>
+          </a:prstGeom>
+          <a:noFill/>
+          <a:ln/>
+        </p:spPr>
+        <p:txBody>
+          <a:bodyPr wrap="square" lIns="0" tIns="0" rIns="0" bIns="0" rtlCol="0" anchor="ctr"/>
+          <a:lstStyle/>
+          <a:p>
+            <a:pPr indent="0" marL="0">
+              <a:buNone/>
+            </a:pPr>
+            <a:r>
+              <a:rPr lang="zh-TW" altLang="en-US" sz="1050" dirty="0">
+                <a:solidFill>
+                  <a:schemeClr val="tx1"/>
+                </a:solidFill>
+                <a:latin typeface="Consolas" pitchFamily="34" charset="0"/>
+                <a:ea typeface="Consolas" pitchFamily="34" charset="-122"/>
+                <a:cs typeface="Consolas" pitchFamily="34" charset="-120"/>
+              </a:rPr>
+              <a:t>lunyi-laptop</a:t>
+            </a:r>
+            <a:endParaRPr lang="zh-TW" sz="1050" dirty="0"/>
+          </a:p>
+        </p:txBody>
+      </p:sp>
+      <p:sp>
+        <p:nvSpPr>
+          <p:cNvPr id="22" name="marker-1"/>
+          <p:cNvSpPr/>
+          <p:nvPr/>
+        </p:nvSpPr>
+        <p:spPr>
+          <a:xfrm>
+            <a:off x="5907024" y="2651760"/>
+            <a:ext cx="274320" cy="274320"/>
+          </a:xfrm>
+          <a:prstGeom prst="ellipse">
+            <a:avLst/>
+          </a:prstGeom>
+          <a:solidFill>
+            <a:schemeClr val="accent1"/>
+          </a:solidFill>
+          <a:ln w="19050">
+            <a:solidFill>
+              <a:srgbClr val="FFFFFF"/>
+            </a:solidFill>
+            <a:prstDash val="solid"/>
+          </a:ln>
+        </p:spPr>
+      </p:sp>
+      <p:sp>
+        <p:nvSpPr>
+          <p:cNvPr id="23" name="marker-1-text"/>
+          <p:cNvSpPr txBox="1"/>
+          <p:nvPr/>
+        </p:nvSpPr>
+        <p:spPr>
+          <a:xfrm>
+            <a:off x="5907024" y="2651760"/>
+            <a:ext cx="274320" cy="274320"/>
+          </a:xfrm>
+          <a:prstGeom prst="rect">
+            <a:avLst/>
+          </a:prstGeom>
+          <a:noFill/>
+          <a:ln/>
+        </p:spPr>
+        <p:txBody>
+          <a:bodyPr wrap="square" lIns="0" tIns="0" rIns="0" bIns="0" rtlCol="0" anchor="ctr"/>
+          <a:lstStyle/>
+          <a:p>
+            <a:pPr algn="ctr" indent="0" marL="0">
+              <a:buNone/>
+            </a:pPr>
+            <a:r>
+              <a:rPr lang="zh-TW" altLang="en-US" sz="1200" b="1" dirty="0">
+                <a:solidFill>
+                  <a:schemeClr val="bg1"/>
+                </a:solidFill>
+              </a:rPr>
+              <a:t>1</a:t>
+            </a:r>
+            <a:endParaRPr lang="zh-TW" sz="1200" dirty="0"/>
+          </a:p>
+        </p:txBody>
+      </p:sp>
+      <p:sp>
+        <p:nvSpPr>
+          <p:cNvPr id="24" name="Text 22"/>
+          <p:cNvSpPr txBox="1"/>
+          <p:nvPr/>
+        </p:nvSpPr>
+        <p:spPr>
+          <a:xfrm>
+            <a:off x="2560320" y="3054096"/>
+            <a:ext cx="4389120" cy="201168"/>
+          </a:xfrm>
+          <a:prstGeom prst="rect">
+            <a:avLst/>
+          </a:prstGeom>
+          <a:noFill/>
+          <a:ln/>
+        </p:spPr>
+        <p:txBody>
+          <a:bodyPr wrap="square" lIns="0" tIns="0" rIns="0" bIns="0" rtlCol="0" anchor="ctr"/>
+          <a:lstStyle/>
+          <a:p>
+            <a:pPr indent="0" marL="0">
+              <a:buNone/>
+            </a:pPr>
+            <a:r>
+              <a:rPr lang="zh-TW" altLang="en-US" sz="1000" b="1" dirty="0">
+                <a:solidFill>
+                  <a:schemeClr val="tx1"/>
+                </a:solidFill>
+              </a:rPr>
+              <a:t>到期時間</a:t>
+            </a:r>
+            <a:endParaRPr lang="zh-TW" sz="1000" dirty="0"/>
+          </a:p>
+        </p:txBody>
+      </p:sp>
+      <p:sp>
+        <p:nvSpPr>
+          <p:cNvPr id="25" name="Shape 23"/>
+          <p:cNvSpPr/>
+          <p:nvPr/>
+        </p:nvSpPr>
+        <p:spPr>
+          <a:xfrm>
+            <a:off x="2560320" y="3273552"/>
+            <a:ext cx="3291840" cy="310896"/>
+          </a:xfrm>
+          <a:prstGeom prst="roundRect">
+            <a:avLst>
+              <a:gd name="adj" fmla="val 11765"/>
+            </a:avLst>
+          </a:prstGeom>
+          <a:solidFill>
+            <a:schemeClr val="accent4"/>
+          </a:solidFill>
+          <a:ln w="25400">
+            <a:solidFill>
+              <a:schemeClr val="accent3"/>
+            </a:solidFill>
+            <a:prstDash val="solid"/>
+          </a:ln>
+        </p:spPr>
+      </p:sp>
+      <p:sp>
+        <p:nvSpPr>
+          <p:cNvPr id="26" name="Text 24"/>
+          <p:cNvSpPr txBox="1"/>
+          <p:nvPr/>
+        </p:nvSpPr>
+        <p:spPr>
+          <a:xfrm>
+            <a:off x="2651760" y="3273552"/>
+            <a:ext cx="3108960" cy="310896"/>
+          </a:xfrm>
+          <a:prstGeom prst="rect">
+            <a:avLst/>
+          </a:prstGeom>
+          <a:noFill/>
+          <a:ln/>
+        </p:spPr>
+        <p:txBody>
+          <a:bodyPr wrap="square" lIns="0" tIns="0" rIns="0" bIns="0" rtlCol="0" anchor="ctr"/>
+          <a:lstStyle/>
+          <a:p>
+            <a:pPr indent="0" marL="0">
+              <a:buNone/>
+            </a:pPr>
+            <a:r>
+              <a:rPr lang="zh-TW" altLang="en-US" sz="1050" dirty="0">
+                <a:solidFill>
+                  <a:schemeClr val="tx1"/>
+                </a:solidFill>
+              </a:rPr>
+              <a:t>永不</a:t>
+            </a:r>
+            <a:endParaRPr lang="zh-TW" sz="1050" dirty="0"/>
+          </a:p>
+        </p:txBody>
+      </p:sp>
+      <p:sp>
+        <p:nvSpPr>
+          <p:cNvPr id="27" name="marker-2"/>
+          <p:cNvSpPr/>
+          <p:nvPr/>
+        </p:nvSpPr>
+        <p:spPr>
+          <a:xfrm>
+            <a:off x="5907024" y="3291840"/>
+            <a:ext cx="274320" cy="274320"/>
+          </a:xfrm>
+          <a:prstGeom prst="ellipse">
+            <a:avLst/>
+          </a:prstGeom>
+          <a:solidFill>
+            <a:schemeClr val="accent1"/>
+          </a:solidFill>
+          <a:ln w="19050">
+            <a:solidFill>
+              <a:srgbClr val="FFFFFF"/>
+            </a:solidFill>
+            <a:prstDash val="solid"/>
+          </a:ln>
+        </p:spPr>
+      </p:sp>
+      <p:sp>
+        <p:nvSpPr>
+          <p:cNvPr id="28" name="marker-2-text"/>
+          <p:cNvSpPr txBox="1"/>
+          <p:nvPr/>
+        </p:nvSpPr>
+        <p:spPr>
+          <a:xfrm>
+            <a:off x="5907024" y="3291840"/>
+            <a:ext cx="274320" cy="274320"/>
+          </a:xfrm>
+          <a:prstGeom prst="rect">
+            <a:avLst/>
+          </a:prstGeom>
+          <a:noFill/>
+          <a:ln/>
+        </p:spPr>
+        <p:txBody>
+          <a:bodyPr wrap="square" lIns="0" tIns="0" rIns="0" bIns="0" rtlCol="0" anchor="ctr"/>
+          <a:lstStyle/>
+          <a:p>
+            <a:pPr algn="ctr" indent="0" marL="0">
+              <a:buNone/>
+            </a:pPr>
+            <a:r>
+              <a:rPr lang="zh-TW" altLang="en-US" sz="1200" b="1" dirty="0">
+                <a:solidFill>
+                  <a:schemeClr val="bg1"/>
+                </a:solidFill>
+              </a:rPr>
+              <a:t>2</a:t>
+            </a:r>
+            <a:endParaRPr lang="zh-TW" sz="1200" dirty="0"/>
+          </a:p>
+        </p:txBody>
+      </p:sp>
+      <p:sp>
+        <p:nvSpPr>
+          <p:cNvPr id="29" name="Text 27"/>
+          <p:cNvSpPr txBox="1"/>
+          <p:nvPr/>
+        </p:nvSpPr>
+        <p:spPr>
+          <a:xfrm>
+            <a:off x="2560320" y="3694176"/>
+            <a:ext cx="4389120" cy="201168"/>
+          </a:xfrm>
+          <a:prstGeom prst="rect">
+            <a:avLst/>
+          </a:prstGeom>
+          <a:noFill/>
+          <a:ln/>
+        </p:spPr>
+        <p:txBody>
+          <a:bodyPr wrap="square" lIns="0" tIns="0" rIns="0" bIns="0" rtlCol="0" anchor="ctr"/>
+          <a:lstStyle/>
+          <a:p>
+            <a:pPr indent="0" marL="0">
+              <a:buNone/>
+            </a:pPr>
+            <a:r>
+              <a:rPr lang="zh-TW" altLang="en-US" sz="1000" b="1" dirty="0">
+                <a:solidFill>
+                  <a:schemeClr val="tx1"/>
+                </a:solidFill>
+              </a:rPr>
+              <a:t>已連結的帳戶</a:t>
+            </a:r>
+            <a:endParaRPr lang="zh-TW" sz="1000" dirty="0"/>
+          </a:p>
+        </p:txBody>
+      </p:sp>
+      <p:sp>
+        <p:nvSpPr>
+          <p:cNvPr id="30" name="Shape 28"/>
+          <p:cNvSpPr/>
+          <p:nvPr/>
+        </p:nvSpPr>
+        <p:spPr>
+          <a:xfrm>
+            <a:off x="2560320" y="3913632"/>
+            <a:ext cx="3291840" cy="310896"/>
+          </a:xfrm>
+          <a:prstGeom prst="roundRect">
+            <a:avLst>
+              <a:gd name="adj" fmla="val 11765"/>
+            </a:avLst>
+          </a:prstGeom>
+          <a:solidFill>
+            <a:schemeClr val="accent4"/>
+          </a:solidFill>
+          <a:ln w="25400">
+            <a:solidFill>
+              <a:schemeClr val="accent3"/>
+            </a:solidFill>
+            <a:prstDash val="solid"/>
+          </a:ln>
+        </p:spPr>
+      </p:sp>
+      <p:sp>
+        <p:nvSpPr>
+          <p:cNvPr id="31" name="Text 29"/>
+          <p:cNvSpPr txBox="1"/>
+          <p:nvPr/>
+        </p:nvSpPr>
+        <p:spPr>
+          <a:xfrm>
+            <a:off x="2651760" y="3913632"/>
+            <a:ext cx="3108960" cy="310896"/>
+          </a:xfrm>
+          <a:prstGeom prst="rect">
+            <a:avLst/>
+          </a:prstGeom>
+          <a:noFill/>
+          <a:ln/>
+        </p:spPr>
+        <p:txBody>
+          <a:bodyPr wrap="square" lIns="0" tIns="0" rIns="0" bIns="0" rtlCol="0" anchor="ctr"/>
+          <a:lstStyle/>
+          <a:p>
+            <a:pPr indent="0" marL="0">
+              <a:buNone/>
+            </a:pPr>
+            <a:r>
+              <a:rPr lang="zh-TW" altLang="en-US" sz="1050" dirty="0">
+                <a:solidFill>
+                  <a:schemeClr val="tx1"/>
+                </a:solidFill>
+              </a:rPr>
+              <a:t>charles（你自己）</a:t>
+            </a:r>
+            <a:endParaRPr lang="zh-TW" sz="1050" dirty="0"/>
+          </a:p>
+        </p:txBody>
+      </p:sp>
+      <p:sp>
+        <p:nvSpPr>
+          <p:cNvPr id="32" name="marker-2"/>
+          <p:cNvSpPr/>
+          <p:nvPr/>
+        </p:nvSpPr>
+        <p:spPr>
+          <a:xfrm>
+            <a:off x="5907024" y="3931920"/>
+            <a:ext cx="274320" cy="274320"/>
+          </a:xfrm>
+          <a:prstGeom prst="ellipse">
+            <a:avLst/>
+          </a:prstGeom>
+          <a:solidFill>
+            <a:schemeClr val="accent1"/>
+          </a:solidFill>
+          <a:ln w="19050">
+            <a:solidFill>
+              <a:srgbClr val="FFFFFF"/>
+            </a:solidFill>
+            <a:prstDash val="solid"/>
+          </a:ln>
+        </p:spPr>
+      </p:sp>
+      <p:sp>
+        <p:nvSpPr>
+          <p:cNvPr id="33" name="marker-2-text"/>
+          <p:cNvSpPr txBox="1"/>
+          <p:nvPr/>
+        </p:nvSpPr>
+        <p:spPr>
+          <a:xfrm>
+            <a:off x="5907024" y="3931920"/>
+            <a:ext cx="274320" cy="274320"/>
+          </a:xfrm>
+          <a:prstGeom prst="rect">
+            <a:avLst/>
+          </a:prstGeom>
+          <a:noFill/>
+          <a:ln/>
+        </p:spPr>
+        <p:txBody>
+          <a:bodyPr wrap="square" lIns="0" tIns="0" rIns="0" bIns="0" rtlCol="0" anchor="ctr"/>
+          <a:lstStyle/>
+          <a:p>
+            <a:pPr algn="ctr" indent="0" marL="0">
+              <a:buNone/>
+            </a:pPr>
+            <a:r>
+              <a:rPr lang="zh-TW" altLang="en-US" sz="1200" b="1" dirty="0">
+                <a:solidFill>
+                  <a:schemeClr val="bg1"/>
+                </a:solidFill>
+              </a:rPr>
+              <a:t>2</a:t>
+            </a:r>
+            <a:endParaRPr lang="zh-TW" sz="1200" dirty="0"/>
+          </a:p>
+        </p:txBody>
+      </p:sp>
+      <p:sp>
+        <p:nvSpPr>
+          <p:cNvPr id="34" name="Text 32"/>
+          <p:cNvSpPr txBox="1"/>
+          <p:nvPr/>
+        </p:nvSpPr>
+        <p:spPr>
+          <a:xfrm>
+            <a:off x="2560320" y="4334256"/>
+            <a:ext cx="4389120" cy="201168"/>
+          </a:xfrm>
+          <a:prstGeom prst="rect">
+            <a:avLst/>
+          </a:prstGeom>
+          <a:noFill/>
+          <a:ln/>
+        </p:spPr>
+        <p:txBody>
+          <a:bodyPr wrap="square" lIns="0" tIns="0" rIns="0" bIns="0" rtlCol="0" anchor="ctr"/>
+          <a:lstStyle/>
+          <a:p>
+            <a:pPr indent="0" marL="0">
+              <a:buNone/>
+            </a:pPr>
+            <a:r>
+              <a:rPr lang="zh-TW" altLang="en-US" sz="1000" b="1" dirty="0">
+                <a:solidFill>
+                  <a:schemeClr val="tx1"/>
+                </a:solidFill>
+              </a:rPr>
+              <a:t>範圍</a:t>
+            </a:r>
+            <a:endParaRPr lang="zh-TW" sz="1000" dirty="0"/>
+          </a:p>
+        </p:txBody>
+      </p:sp>
+      <p:sp>
+        <p:nvSpPr>
+          <p:cNvPr id="35" name="Shape 33"/>
+          <p:cNvSpPr/>
+          <p:nvPr/>
+        </p:nvSpPr>
+        <p:spPr>
+          <a:xfrm>
+            <a:off x="2560320" y="4553712"/>
+            <a:ext cx="3291840" cy="310896"/>
+          </a:xfrm>
+          <a:prstGeom prst="roundRect">
+            <a:avLst>
+              <a:gd name="adj" fmla="val 11765"/>
+            </a:avLst>
+          </a:prstGeom>
+          <a:solidFill>
+            <a:schemeClr val="accent4"/>
+          </a:solidFill>
+          <a:ln w="25400">
+            <a:solidFill>
+              <a:schemeClr val="accent3"/>
+            </a:solidFill>
+            <a:prstDash val="solid"/>
+          </a:ln>
+        </p:spPr>
+      </p:sp>
+      <p:sp>
+        <p:nvSpPr>
+          <p:cNvPr id="36" name="Text 34"/>
+          <p:cNvSpPr txBox="1"/>
+          <p:nvPr/>
+        </p:nvSpPr>
+        <p:spPr>
+          <a:xfrm>
+            <a:off x="2651760" y="4553712"/>
+            <a:ext cx="3108960" cy="310896"/>
+          </a:xfrm>
+          <a:prstGeom prst="rect">
+            <a:avLst/>
+          </a:prstGeom>
+          <a:noFill/>
+          <a:ln/>
+        </p:spPr>
+        <p:txBody>
+          <a:bodyPr wrap="square" lIns="0" tIns="0" rIns="0" bIns="0" rtlCol="0" anchor="ctr"/>
+          <a:lstStyle/>
+          <a:p>
+            <a:pPr indent="0" marL="0">
+              <a:buNone/>
+            </a:pPr>
+            <a:r>
+              <a:rPr lang="zh-TW" altLang="en-US" sz="1050" dirty="0">
+                <a:solidFill>
+                  <a:schemeClr val="tx1"/>
+                </a:solidFill>
+              </a:rPr>
+              <a:t>lunyi（或「預設工作區」）</a:t>
+            </a:r>
+            <a:endParaRPr lang="zh-TW" sz="1050" dirty="0"/>
+          </a:p>
+        </p:txBody>
+      </p:sp>
+      <p:sp>
+        <p:nvSpPr>
+          <p:cNvPr id="37" name="marker-3"/>
+          <p:cNvSpPr/>
+          <p:nvPr/>
+        </p:nvSpPr>
+        <p:spPr>
+          <a:xfrm>
+            <a:off x="5907024" y="4572000"/>
+            <a:ext cx="274320" cy="274320"/>
+          </a:xfrm>
+          <a:prstGeom prst="ellipse">
+            <a:avLst/>
+          </a:prstGeom>
+          <a:solidFill>
+            <a:schemeClr val="accent1"/>
+          </a:solidFill>
+          <a:ln w="19050">
+            <a:solidFill>
+              <a:srgbClr val="FFFFFF"/>
+            </a:solidFill>
+            <a:prstDash val="solid"/>
+          </a:ln>
+        </p:spPr>
+      </p:sp>
+      <p:sp>
+        <p:nvSpPr>
+          <p:cNvPr id="38" name="marker-3-text"/>
+          <p:cNvSpPr txBox="1"/>
+          <p:nvPr/>
+        </p:nvSpPr>
+        <p:spPr>
+          <a:xfrm>
+            <a:off x="5907024" y="4572000"/>
+            <a:ext cx="274320" cy="274320"/>
+          </a:xfrm>
+          <a:prstGeom prst="rect">
+            <a:avLst/>
+          </a:prstGeom>
+          <a:noFill/>
+          <a:ln/>
+        </p:spPr>
+        <p:txBody>
+          <a:bodyPr wrap="square" lIns="0" tIns="0" rIns="0" bIns="0" rtlCol="0" anchor="ctr"/>
+          <a:lstStyle/>
+          <a:p>
+            <a:pPr algn="ctr" indent="0" marL="0">
+              <a:buNone/>
+            </a:pPr>
+            <a:r>
+              <a:rPr lang="zh-TW" altLang="en-US" sz="1200" b="1" dirty="0">
+                <a:solidFill>
+                  <a:schemeClr val="bg1"/>
+                </a:solidFill>
+              </a:rPr>
+              <a:t>3</a:t>
+            </a:r>
+            <a:endParaRPr lang="zh-TW" sz="1200" dirty="0"/>
+          </a:p>
+        </p:txBody>
+      </p:sp>
+      <p:sp>
+        <p:nvSpPr>
+          <p:cNvPr id="39" name="Shape 37"/>
+          <p:cNvSpPr/>
+          <p:nvPr/>
+        </p:nvSpPr>
+        <p:spPr>
+          <a:xfrm>
+            <a:off x="2560320" y="4974336"/>
+            <a:ext cx="1280160" cy="310896"/>
           </a:xfrm>
           <a:prstGeom prst="roundRect">
             <a:avLst>
@@ -8211,14 +8818,14 @@
       </p:sp>
       <p:sp>
         <p:nvSpPr>
-          <p:cNvPr id="21" name="Text 19"/>
-          <p:cNvSpPr txBox="1"/>
-          <p:nvPr/>
-        </p:nvSpPr>
-        <p:spPr>
-          <a:xfrm>
-            <a:off x="2560320" y="2011680"/>
-            <a:ext cx="1371600" cy="310896"/>
+          <p:cNvPr id="40" name="Text 38"/>
+          <p:cNvSpPr txBox="1"/>
+          <p:nvPr/>
+        </p:nvSpPr>
+        <p:spPr>
+          <a:xfrm>
+            <a:off x="2560320" y="4974336"/>
+            <a:ext cx="1280160" cy="310896"/>
           </a:xfrm>
           <a:prstGeom prst="rect">
             <a:avLst/>
@@ -8239,7 +8846,7 @@
                   <a:schemeClr val="bg1"/>
                 </a:solidFill>
               </a:rPr>
-              <a:t>Create key</a:t>
+              <a:t>建立金鑰</a:t>
             </a:r>
             <a:endParaRPr lang="zh-TW" sz="1050" dirty="0"/>
           </a:p>
@@ -8247,13 +8854,13 @@
       </p:sp>
       <p:sp>
         <p:nvSpPr>
-          <p:cNvPr id="22" name="marker-1"/>
+          <p:cNvPr id="41" name="marker-4"/>
           <p:cNvSpPr/>
           <p:nvPr/>
         </p:nvSpPr>
         <p:spPr>
           <a:xfrm>
-            <a:off x="3986784" y="2029968"/>
+            <a:off x="3895344" y="4992624"/>
             <a:ext cx="274320" cy="274320"/>
           </a:xfrm>
           <a:prstGeom prst="ellipse">
@@ -8272,13 +8879,13 @@
       </p:sp>
       <p:sp>
         <p:nvSpPr>
-          <p:cNvPr id="23" name="marker-1-text"/>
-          <p:cNvSpPr txBox="1"/>
-          <p:nvPr/>
-        </p:nvSpPr>
-        <p:spPr>
-          <a:xfrm>
-            <a:off x="3986784" y="2029968"/>
+          <p:cNvPr id="42" name="marker-4-text"/>
+          <p:cNvSpPr txBox="1"/>
+          <p:nvPr/>
+        </p:nvSpPr>
+        <p:spPr>
+          <a:xfrm>
+            <a:off x="3895344" y="4992624"/>
             <a:ext cx="274320" cy="274320"/>
           </a:xfrm>
           <a:prstGeom prst="rect">
@@ -8300,7 +8907,7 @@
                   <a:schemeClr val="bg1"/>
                 </a:solidFill>
               </a:rPr>
-              <a:t>1</a:t>
+              <a:t>4</a:t>
             </a:r>
             <a:endParaRPr lang="zh-TW" sz="1200" dirty="0"/>
           </a:p>
@@ -8308,215 +8915,14 @@
       </p:sp>
       <p:sp>
         <p:nvSpPr>
-          <p:cNvPr id="24" name="Text 22"/>
-          <p:cNvSpPr txBox="1"/>
-          <p:nvPr/>
-        </p:nvSpPr>
-        <p:spPr>
-          <a:xfrm>
-            <a:off x="2560320" y="2468880"/>
-            <a:ext cx="4389120" cy="201168"/>
-          </a:xfrm>
-          <a:prstGeom prst="rect">
-            <a:avLst/>
-          </a:prstGeom>
-          <a:noFill/>
-          <a:ln/>
-        </p:spPr>
-        <p:txBody>
-          <a:bodyPr wrap="square" lIns="0" tIns="0" rIns="0" bIns="0" rtlCol="0" anchor="ctr"/>
-          <a:lstStyle/>
-          <a:p>
-            <a:pPr indent="0" marL="0">
-              <a:buNone/>
-            </a:pPr>
-            <a:r>
-              <a:rPr lang="zh-TW" altLang="en-US" sz="1000" b="1" dirty="0">
-                <a:solidFill>
-                  <a:schemeClr val="tx1"/>
-                </a:solidFill>
-              </a:rPr>
-              <a:t>Name</a:t>
-            </a:r>
-            <a:endParaRPr lang="zh-TW" sz="1000" dirty="0"/>
-          </a:p>
-        </p:txBody>
-      </p:sp>
-      <p:sp>
-        <p:nvSpPr>
-          <p:cNvPr id="25" name="Shape 23"/>
+          <p:cNvPr id="43" name="marker-1"/>
           <p:cNvSpPr/>
           <p:nvPr/>
         </p:nvSpPr>
         <p:spPr>
           <a:xfrm>
-            <a:off x="2560320" y="2688336"/>
-            <a:ext cx="3291840" cy="310896"/>
-          </a:xfrm>
-          <a:prstGeom prst="roundRect">
-            <a:avLst>
-              <a:gd name="adj" fmla="val 11765"/>
-            </a:avLst>
-          </a:prstGeom>
-          <a:solidFill>
-            <a:schemeClr val="accent4"/>
-          </a:solidFill>
-          <a:ln w="9525">
-            <a:solidFill>
-              <a:srgbClr val="BDB6A9"/>
-            </a:solidFill>
-            <a:prstDash val="solid"/>
-          </a:ln>
-        </p:spPr>
-      </p:sp>
-      <p:sp>
-        <p:nvSpPr>
-          <p:cNvPr id="26" name="Text 24"/>
-          <p:cNvSpPr txBox="1"/>
-          <p:nvPr/>
-        </p:nvSpPr>
-        <p:spPr>
-          <a:xfrm>
-            <a:off x="2651760" y="2688336"/>
-            <a:ext cx="3108960" cy="310896"/>
-          </a:xfrm>
-          <a:prstGeom prst="rect">
-            <a:avLst/>
-          </a:prstGeom>
-          <a:noFill/>
-          <a:ln/>
-        </p:spPr>
-        <p:txBody>
-          <a:bodyPr wrap="square" lIns="0" tIns="0" rIns="0" bIns="0" rtlCol="0" anchor="ctr"/>
-          <a:lstStyle/>
-          <a:p>
-            <a:pPr indent="0" marL="0">
-              <a:buNone/>
-            </a:pPr>
-            <a:r>
-              <a:rPr lang="zh-TW" altLang="en-US" sz="1050" dirty="0">
-                <a:solidFill>
-                  <a:schemeClr val="tx1"/>
-                </a:solidFill>
-                <a:latin typeface="Consolas" pitchFamily="34" charset="0"/>
-                <a:ea typeface="Consolas" pitchFamily="34" charset="-122"/>
-                <a:cs typeface="Consolas" pitchFamily="34" charset="-120"/>
-              </a:rPr>
-              <a:t>lunyi-laptop</a:t>
-            </a:r>
-            <a:endParaRPr lang="zh-TW" sz="1050" dirty="0"/>
-          </a:p>
-        </p:txBody>
-      </p:sp>
-      <p:sp>
-        <p:nvSpPr>
-          <p:cNvPr id="27" name="Text 25"/>
-          <p:cNvSpPr txBox="1"/>
-          <p:nvPr/>
-        </p:nvSpPr>
-        <p:spPr>
-          <a:xfrm>
-            <a:off x="2560320" y="3108960"/>
-            <a:ext cx="4389120" cy="201168"/>
-          </a:xfrm>
-          <a:prstGeom prst="rect">
-            <a:avLst/>
-          </a:prstGeom>
-          <a:noFill/>
-          <a:ln/>
-        </p:spPr>
-        <p:txBody>
-          <a:bodyPr wrap="square" lIns="0" tIns="0" rIns="0" bIns="0" rtlCol="0" anchor="ctr"/>
-          <a:lstStyle/>
-          <a:p>
-            <a:pPr indent="0" marL="0">
-              <a:buNone/>
-            </a:pPr>
-            <a:r>
-              <a:rPr lang="zh-TW" altLang="en-US" sz="1000" b="1" dirty="0">
-                <a:solidFill>
-                  <a:schemeClr val="tx1"/>
-                </a:solidFill>
-              </a:rPr>
-              <a:t>Linked account</a:t>
-            </a:r>
-            <a:endParaRPr lang="zh-TW" sz="1000" dirty="0"/>
-          </a:p>
-        </p:txBody>
-      </p:sp>
-      <p:sp>
-        <p:nvSpPr>
-          <p:cNvPr id="28" name="Shape 26"/>
-          <p:cNvSpPr/>
-          <p:nvPr/>
-        </p:nvSpPr>
-        <p:spPr>
-          <a:xfrm>
-            <a:off x="2560320" y="3328416"/>
-            <a:ext cx="3291840" cy="310896"/>
-          </a:xfrm>
-          <a:prstGeom prst="roundRect">
-            <a:avLst>
-              <a:gd name="adj" fmla="val 11765"/>
-            </a:avLst>
-          </a:prstGeom>
-          <a:solidFill>
-            <a:schemeClr val="accent4"/>
-          </a:solidFill>
-          <a:ln w="25400">
-            <a:solidFill>
-              <a:schemeClr val="accent3"/>
-            </a:solidFill>
-            <a:prstDash val="solid"/>
-          </a:ln>
-        </p:spPr>
-      </p:sp>
-      <p:sp>
-        <p:nvSpPr>
-          <p:cNvPr id="29" name="Text 27"/>
-          <p:cNvSpPr txBox="1"/>
-          <p:nvPr/>
-        </p:nvSpPr>
-        <p:spPr>
-          <a:xfrm>
-            <a:off x="2651760" y="3328416"/>
-            <a:ext cx="3108960" cy="310896"/>
-          </a:xfrm>
-          <a:prstGeom prst="rect">
-            <a:avLst/>
-          </a:prstGeom>
-          <a:noFill/>
-          <a:ln/>
-        </p:spPr>
-        <p:txBody>
-          <a:bodyPr wrap="square" lIns="0" tIns="0" rIns="0" bIns="0" rtlCol="0" anchor="ctr"/>
-          <a:lstStyle/>
-          <a:p>
-            <a:pPr indent="0" marL="0">
-              <a:buNone/>
-            </a:pPr>
-            <a:r>
-              <a:rPr lang="zh-TW" altLang="en-US" sz="1050" dirty="0">
-                <a:solidFill>
-                  <a:schemeClr val="tx1"/>
-                </a:solidFill>
-              </a:rPr>
-              <a:t>你自己（personal key）</a:t>
-            </a:r>
-            <a:endParaRPr lang="zh-TW" sz="1050" dirty="0"/>
-          </a:p>
-        </p:txBody>
-      </p:sp>
-      <p:sp>
-        <p:nvSpPr>
-          <p:cNvPr id="30" name="marker-1"/>
-          <p:cNvSpPr/>
-          <p:nvPr/>
-        </p:nvSpPr>
-        <p:spPr>
-          <a:xfrm>
-            <a:off x="5907024" y="3346704"/>
-            <a:ext cx="274320" cy="274320"/>
+            <a:off x="7452360" y="1472184"/>
+            <a:ext cx="292608" cy="292608"/>
           </a:xfrm>
           <a:prstGeom prst="ellipse">
             <a:avLst/>
@@ -8534,14 +8940,14 @@
       </p:sp>
       <p:sp>
         <p:nvSpPr>
-          <p:cNvPr id="31" name="marker-1-text"/>
-          <p:cNvSpPr txBox="1"/>
-          <p:nvPr/>
-        </p:nvSpPr>
-        <p:spPr>
-          <a:xfrm>
-            <a:off x="5907024" y="3346704"/>
-            <a:ext cx="274320" cy="274320"/>
+          <p:cNvPr id="44" name="marker-1-text"/>
+          <p:cNvSpPr txBox="1"/>
+          <p:nvPr/>
+        </p:nvSpPr>
+        <p:spPr>
+          <a:xfrm>
+            <a:off x="7452360" y="1472184"/>
+            <a:ext cx="292608" cy="292608"/>
           </a:xfrm>
           <a:prstGeom prst="rect">
             <a:avLst/>
@@ -8570,116 +8976,86 @@
       </p:sp>
       <p:sp>
         <p:nvSpPr>
-          <p:cNvPr id="32" name="Text 30"/>
-          <p:cNvSpPr txBox="1"/>
-          <p:nvPr/>
-        </p:nvSpPr>
-        <p:spPr>
-          <a:xfrm>
-            <a:off x="2560320" y="3749040"/>
-            <a:ext cx="4389120" cy="201168"/>
-          </a:xfrm>
-          <a:prstGeom prst="rect">
-            <a:avLst/>
-          </a:prstGeom>
-          <a:noFill/>
-          <a:ln/>
-        </p:spPr>
-        <p:txBody>
-          <a:bodyPr wrap="square" lIns="0" tIns="0" rIns="0" bIns="0" rtlCol="0" anchor="ctr"/>
-          <a:lstStyle/>
-          <a:p>
-            <a:pPr indent="0" marL="0">
-              <a:buNone/>
-            </a:pPr>
-            <a:r>
-              <a:rPr lang="zh-TW" altLang="en-US" sz="1000" b="1" dirty="0">
+          <p:cNvPr id="45" name="Text 43"/>
+          <p:cNvSpPr txBox="1"/>
+          <p:nvPr/>
+        </p:nvSpPr>
+        <p:spPr>
+          <a:xfrm>
+            <a:off x="7854696" y="1463040"/>
+            <a:ext cx="3788359" cy="252984"/>
+          </a:xfrm>
+          <a:prstGeom prst="rect">
+            <a:avLst/>
+          </a:prstGeom>
+          <a:noFill/>
+          <a:ln/>
+        </p:spPr>
+        <p:txBody>
+          <a:bodyPr wrap="square" lIns="0" tIns="0" rIns="0" bIns="0" rtlCol="0" anchor="t"/>
+          <a:lstStyle/>
+          <a:p>
+            <a:pPr indent="0" marL="0">
+              <a:buNone/>
+            </a:pPr>
+            <a:r>
+              <a:rPr lang="zh-TW" altLang="en-US" sz="1400" b="1" dirty="0">
                 <a:solidFill>
                   <a:schemeClr val="tx1"/>
                 </a:solidFill>
               </a:rPr>
-              <a:t>Workspace</a:t>
-            </a:r>
-            <a:endParaRPr lang="zh-TW" sz="1000" dirty="0"/>
-          </a:p>
-        </p:txBody>
-      </p:sp>
-      <p:sp>
-        <p:nvSpPr>
-          <p:cNvPr id="33" name="Shape 31"/>
+              <a:t>左側「API 金鑰」→ 建立金鑰</a:t>
+            </a:r>
+            <a:endParaRPr lang="zh-TW" sz="1400" dirty="0"/>
+          </a:p>
+        </p:txBody>
+      </p:sp>
+      <p:sp>
+        <p:nvSpPr>
+          <p:cNvPr id="46" name="Text 44"/>
+          <p:cNvSpPr txBox="1"/>
+          <p:nvPr/>
+        </p:nvSpPr>
+        <p:spPr>
+          <a:xfrm>
+            <a:off x="7854696" y="1770888"/>
+            <a:ext cx="3788359" cy="1225296"/>
+          </a:xfrm>
+          <a:prstGeom prst="rect">
+            <a:avLst/>
+          </a:prstGeom>
+          <a:noFill/>
+          <a:ln/>
+        </p:spPr>
+        <p:txBody>
+          <a:bodyPr wrap="square" lIns="0" tIns="0" rIns="0" bIns="0" rtlCol="0" anchor="t"/>
+          <a:lstStyle/>
+          <a:p>
+            <a:pPr indent="0" marL="0">
+              <a:buNone/>
+            </a:pPr>
+            <a:r>
+              <a:rPr lang="zh-TW" altLang="en-US" sz="1200" dirty="0">
+                <a:solidFill>
+                  <a:schemeClr val="tx2"/>
+                </a:solidFill>
+              </a:rPr>
+              <a:t>在「金鑰與存取權」底下。先確認右上角顯示 Max 附送的額度（例如 US$200）。跳出「使用身分聯盟，您不需要 API 金鑰」時按「使用 API 金鑰繼續」；「工作負載身分」那一頁不用設定。名稱用電腦命名，例如 lunyi-laptop（接法 2 另建一把 lunyi-vercel）。</a:t>
+            </a:r>
+            <a:endParaRPr lang="zh-TW" sz="1200" dirty="0"/>
+          </a:p>
+        </p:txBody>
+      </p:sp>
+      <p:sp>
+        <p:nvSpPr>
+          <p:cNvPr id="47" name="marker-2"/>
           <p:cNvSpPr/>
           <p:nvPr/>
         </p:nvSpPr>
         <p:spPr>
           <a:xfrm>
-            <a:off x="2560320" y="3968496"/>
-            <a:ext cx="3291840" cy="310896"/>
-          </a:xfrm>
-          <a:prstGeom prst="roundRect">
-            <a:avLst>
-              <a:gd name="adj" fmla="val 11765"/>
-            </a:avLst>
-          </a:prstGeom>
-          <a:solidFill>
-            <a:schemeClr val="accent4"/>
-          </a:solidFill>
-          <a:ln w="25400">
-            <a:solidFill>
-              <a:schemeClr val="accent3"/>
-            </a:solidFill>
-            <a:prstDash val="solid"/>
-          </a:ln>
-        </p:spPr>
-      </p:sp>
-      <p:sp>
-        <p:nvSpPr>
-          <p:cNvPr id="34" name="Text 32"/>
-          <p:cNvSpPr txBox="1"/>
-          <p:nvPr/>
-        </p:nvSpPr>
-        <p:spPr>
-          <a:xfrm>
-            <a:off x="2651760" y="3968496"/>
-            <a:ext cx="3108960" cy="310896"/>
-          </a:xfrm>
-          <a:prstGeom prst="rect">
-            <a:avLst/>
-          </a:prstGeom>
-          <a:noFill/>
-          <a:ln/>
-        </p:spPr>
-        <p:txBody>
-          <a:bodyPr wrap="square" lIns="0" tIns="0" rIns="0" bIns="0" rtlCol="0" anchor="ctr"/>
-          <a:lstStyle/>
-          <a:p>
-            <a:pPr indent="0" marL="0">
-              <a:buNone/>
-            </a:pPr>
-            <a:r>
-              <a:rPr lang="zh-TW" altLang="en-US" sz="1050" dirty="0">
-                <a:solidFill>
-                  <a:schemeClr val="tx1"/>
-                </a:solidFill>
-                <a:latin typeface="Consolas" pitchFamily="34" charset="0"/>
-                <a:ea typeface="Consolas" pitchFamily="34" charset="-122"/>
-                <a:cs typeface="Consolas" pitchFamily="34" charset="-120"/>
-              </a:rPr>
-              <a:t>lunyi</a:t>
-            </a:r>
-            <a:endParaRPr lang="zh-TW" sz="1050" dirty="0"/>
-          </a:p>
-        </p:txBody>
-      </p:sp>
-      <p:sp>
-        <p:nvSpPr>
-          <p:cNvPr id="35" name="marker-2"/>
-          <p:cNvSpPr/>
-          <p:nvPr/>
-        </p:nvSpPr>
-        <p:spPr>
-          <a:xfrm>
-            <a:off x="5907024" y="3986784"/>
-            <a:ext cx="274320" cy="274320"/>
+            <a:off x="7452360" y="3142488"/>
+            <a:ext cx="292608" cy="292608"/>
           </a:xfrm>
           <a:prstGeom prst="ellipse">
             <a:avLst/>
@@ -8697,14 +9073,14 @@
       </p:sp>
       <p:sp>
         <p:nvSpPr>
-          <p:cNvPr id="36" name="marker-2-text"/>
-          <p:cNvSpPr txBox="1"/>
-          <p:nvPr/>
-        </p:nvSpPr>
-        <p:spPr>
-          <a:xfrm>
-            <a:off x="5907024" y="3986784"/>
-            <a:ext cx="274320" cy="274320"/>
+          <p:cNvPr id="48" name="marker-2-text"/>
+          <p:cNvSpPr txBox="1"/>
+          <p:nvPr/>
+        </p:nvSpPr>
+        <p:spPr>
+          <a:xfrm>
+            <a:off x="7452360" y="3142488"/>
+            <a:ext cx="292608" cy="292608"/>
           </a:xfrm>
           <a:prstGeom prst="rect">
             <a:avLst/>
@@ -8733,116 +9109,86 @@
       </p:sp>
       <p:sp>
         <p:nvSpPr>
-          <p:cNvPr id="37" name="Text 35"/>
-          <p:cNvSpPr txBox="1"/>
-          <p:nvPr/>
-        </p:nvSpPr>
-        <p:spPr>
-          <a:xfrm>
-            <a:off x="2560320" y="4389120"/>
-            <a:ext cx="4389120" cy="201168"/>
-          </a:xfrm>
-          <a:prstGeom prst="rect">
-            <a:avLst/>
-          </a:prstGeom>
-          <a:noFill/>
-          <a:ln/>
-        </p:spPr>
-        <p:txBody>
-          <a:bodyPr wrap="square" lIns="0" tIns="0" rIns="0" bIns="0" rtlCol="0" anchor="ctr"/>
-          <a:lstStyle/>
-          <a:p>
-            <a:pPr indent="0" marL="0">
-              <a:buNone/>
-            </a:pPr>
-            <a:r>
-              <a:rPr lang="zh-TW" altLang="en-US" sz="1000" b="1" dirty="0">
+          <p:cNvPr id="49" name="Text 47"/>
+          <p:cNvSpPr txBox="1"/>
+          <p:nvPr/>
+        </p:nvSpPr>
+        <p:spPr>
+          <a:xfrm>
+            <a:off x="7854696" y="3133344"/>
+            <a:ext cx="3788359" cy="252984"/>
+          </a:xfrm>
+          <a:prstGeom prst="rect">
+            <a:avLst/>
+          </a:prstGeom>
+          <a:noFill/>
+          <a:ln/>
+        </p:spPr>
+        <p:txBody>
+          <a:bodyPr wrap="square" lIns="0" tIns="0" rIns="0" bIns="0" rtlCol="0" anchor="t"/>
+          <a:lstStyle/>
+          <a:p>
+            <a:pPr indent="0" marL="0">
+              <a:buNone/>
+            </a:pPr>
+            <a:r>
+              <a:rPr lang="zh-TW" altLang="en-US" sz="1400" b="1" dirty="0">
                 <a:solidFill>
                   <a:schemeClr val="tx1"/>
                 </a:solidFill>
               </a:rPr>
-              <a:t>Expiration</a:t>
-            </a:r>
-            <a:endParaRPr lang="zh-TW" sz="1000" dirty="0"/>
-          </a:p>
-        </p:txBody>
-      </p:sp>
-      <p:sp>
-        <p:nvSpPr>
-          <p:cNvPr id="38" name="Shape 36"/>
+              <a:t>到期時間選「永不」，已連結的帳戶維持你自己</a:t>
+            </a:r>
+            <a:endParaRPr lang="zh-TW" sz="1400" dirty="0"/>
+          </a:p>
+        </p:txBody>
+      </p:sp>
+      <p:sp>
+        <p:nvSpPr>
+          <p:cNvPr id="50" name="Text 48"/>
+          <p:cNvSpPr txBox="1"/>
+          <p:nvPr/>
+        </p:nvSpPr>
+        <p:spPr>
+          <a:xfrm>
+            <a:off x="7854696" y="3441192"/>
+            <a:ext cx="3788359" cy="621792"/>
+          </a:xfrm>
+          <a:prstGeom prst="rect">
+            <a:avLst/>
+          </a:prstGeom>
+          <a:noFill/>
+          <a:ln/>
+        </p:spPr>
+        <p:txBody>
+          <a:bodyPr wrap="square" lIns="0" tIns="0" rIns="0" bIns="0" rtlCol="0" anchor="t"/>
+          <a:lstStyle/>
+          <a:p>
+            <a:pPr indent="0" marL="0">
+              <a:buNone/>
+            </a:pPr>
+            <a:r>
+              <a:rPr lang="zh-TW" altLang="en-US" sz="1200" dirty="0">
+                <a:solidFill>
+                  <a:schemeClr val="tx2"/>
+                </a:solidFill>
+              </a:rPr>
+              <a:t>有期限的金鑰到期後 AI 會停止，而且建立後不能改。橘色警告是提醒金鑰外流的風險：只貼進論憶或 Vercel，不要貼進對話、程式或 GitHub。</a:t>
+            </a:r>
+            <a:endParaRPr lang="zh-TW" sz="1200" dirty="0"/>
+          </a:p>
+        </p:txBody>
+      </p:sp>
+      <p:sp>
+        <p:nvSpPr>
+          <p:cNvPr id="51" name="marker-3"/>
           <p:cNvSpPr/>
           <p:nvPr/>
         </p:nvSpPr>
         <p:spPr>
           <a:xfrm>
-            <a:off x="2560320" y="4608576"/>
-            <a:ext cx="3291840" cy="310896"/>
-          </a:xfrm>
-          <a:prstGeom prst="roundRect">
-            <a:avLst>
-              <a:gd name="adj" fmla="val 11765"/>
-            </a:avLst>
-          </a:prstGeom>
-          <a:solidFill>
-            <a:schemeClr val="accent4"/>
-          </a:solidFill>
-          <a:ln w="25400">
-            <a:solidFill>
-              <a:schemeClr val="accent3"/>
-            </a:solidFill>
-            <a:prstDash val="solid"/>
-          </a:ln>
-        </p:spPr>
-      </p:sp>
-      <p:sp>
-        <p:nvSpPr>
-          <p:cNvPr id="39" name="Text 37"/>
-          <p:cNvSpPr txBox="1"/>
-          <p:nvPr/>
-        </p:nvSpPr>
-        <p:spPr>
-          <a:xfrm>
-            <a:off x="2651760" y="4608576"/>
-            <a:ext cx="3108960" cy="310896"/>
-          </a:xfrm>
-          <a:prstGeom prst="rect">
-            <a:avLst/>
-          </a:prstGeom>
-          <a:noFill/>
-          <a:ln/>
-        </p:spPr>
-        <p:txBody>
-          <a:bodyPr wrap="square" lIns="0" tIns="0" rIns="0" bIns="0" rtlCol="0" anchor="ctr"/>
-          <a:lstStyle/>
-          <a:p>
-            <a:pPr indent="0" marL="0">
-              <a:buNone/>
-            </a:pPr>
-            <a:r>
-              <a:rPr lang="zh-TW" altLang="en-US" sz="1050" dirty="0">
-                <a:solidFill>
-                  <a:schemeClr val="tx1"/>
-                </a:solidFill>
-                <a:latin typeface="Consolas" pitchFamily="34" charset="0"/>
-                <a:ea typeface="Consolas" pitchFamily="34" charset="-122"/>
-                <a:cs typeface="Consolas" pitchFamily="34" charset="-120"/>
-              </a:rPr>
-              <a:t>Never</a:t>
-            </a:r>
-            <a:endParaRPr lang="zh-TW" sz="1050" dirty="0"/>
-          </a:p>
-        </p:txBody>
-      </p:sp>
-      <p:sp>
-        <p:nvSpPr>
-          <p:cNvPr id="40" name="marker-3"/>
-          <p:cNvSpPr/>
-          <p:nvPr/>
-        </p:nvSpPr>
-        <p:spPr>
-          <a:xfrm>
-            <a:off x="5907024" y="4626864"/>
-            <a:ext cx="274320" cy="274320"/>
+            <a:off x="7452360" y="4209288"/>
+            <a:ext cx="292608" cy="292608"/>
           </a:xfrm>
           <a:prstGeom prst="ellipse">
             <a:avLst/>
@@ -8860,14 +9206,14 @@
       </p:sp>
       <p:sp>
         <p:nvSpPr>
-          <p:cNvPr id="41" name="marker-3-text"/>
-          <p:cNvSpPr txBox="1"/>
-          <p:nvPr/>
-        </p:nvSpPr>
-        <p:spPr>
-          <a:xfrm>
-            <a:off x="5907024" y="4626864"/>
-            <a:ext cx="274320" cy="274320"/>
+          <p:cNvPr id="52" name="marker-3-text"/>
+          <p:cNvSpPr txBox="1"/>
+          <p:nvPr/>
+        </p:nvSpPr>
+        <p:spPr>
+          <a:xfrm>
+            <a:off x="7452360" y="4209288"/>
+            <a:ext cx="292608" cy="292608"/>
           </a:xfrm>
           <a:prstGeom prst="rect">
             <a:avLst/>
@@ -8896,116 +9242,86 @@
       </p:sp>
       <p:sp>
         <p:nvSpPr>
-          <p:cNvPr id="42" name="Text 40"/>
-          <p:cNvSpPr txBox="1"/>
-          <p:nvPr/>
-        </p:nvSpPr>
-        <p:spPr>
-          <a:xfrm>
-            <a:off x="2560320" y="5029200"/>
-            <a:ext cx="4389120" cy="201168"/>
-          </a:xfrm>
-          <a:prstGeom prst="rect">
-            <a:avLst/>
-          </a:prstGeom>
-          <a:noFill/>
-          <a:ln/>
-        </p:spPr>
-        <p:txBody>
-          <a:bodyPr wrap="square" lIns="0" tIns="0" rIns="0" bIns="0" rtlCol="0" anchor="ctr"/>
-          <a:lstStyle/>
-          <a:p>
-            <a:pPr indent="0" marL="0">
-              <a:buNone/>
-            </a:pPr>
-            <a:r>
-              <a:rPr lang="zh-TW" altLang="en-US" sz="1000" b="1" dirty="0">
+          <p:cNvPr id="53" name="Text 51"/>
+          <p:cNvSpPr txBox="1"/>
+          <p:nvPr/>
+        </p:nvSpPr>
+        <p:spPr>
+          <a:xfrm>
+            <a:off x="7854696" y="4200144"/>
+            <a:ext cx="3788359" cy="252984"/>
+          </a:xfrm>
+          <a:prstGeom prst="rect">
+            <a:avLst/>
+          </a:prstGeom>
+          <a:noFill/>
+          <a:ln/>
+        </p:spPr>
+        <p:txBody>
+          <a:bodyPr wrap="square" lIns="0" tIns="0" rIns="0" bIns="0" rtlCol="0" anchor="t"/>
+          <a:lstStyle/>
+          <a:p>
+            <a:pPr indent="0" marL="0">
+              <a:buNone/>
+            </a:pPr>
+            <a:r>
+              <a:rPr lang="zh-TW" altLang="en-US" sz="1400" b="1" dirty="0">
                 <a:solidFill>
                   <a:schemeClr val="tx1"/>
                 </a:solidFill>
               </a:rPr>
-              <a:t>建立後只顯示這一次</a:t>
-            </a:r>
-            <a:endParaRPr lang="zh-TW" sz="1000" dirty="0"/>
-          </a:p>
-        </p:txBody>
-      </p:sp>
-      <p:sp>
-        <p:nvSpPr>
-          <p:cNvPr id="43" name="Shape 41"/>
+              <a:t>範圍選 lunyi；沒建的話「預設工作區」也可以</a:t>
+            </a:r>
+            <a:endParaRPr lang="zh-TW" sz="1400" dirty="0"/>
+          </a:p>
+        </p:txBody>
+      </p:sp>
+      <p:sp>
+        <p:nvSpPr>
+          <p:cNvPr id="54" name="Text 52"/>
+          <p:cNvSpPr txBox="1"/>
+          <p:nvPr/>
+        </p:nvSpPr>
+        <p:spPr>
+          <a:xfrm>
+            <a:off x="7854696" y="4507992"/>
+            <a:ext cx="3788359" cy="621792"/>
+          </a:xfrm>
+          <a:prstGeom prst="rect">
+            <a:avLst/>
+          </a:prstGeom>
+          <a:noFill/>
+          <a:ln/>
+        </p:spPr>
+        <p:txBody>
+          <a:bodyPr wrap="square" lIns="0" tIns="0" rIns="0" bIns="0" rtlCol="0" anchor="t"/>
+          <a:lstStyle/>
+          <a:p>
+            <a:pPr indent="0" marL="0">
+              <a:buNone/>
+            </a:pPr>
+            <a:r>
+              <a:rPr lang="zh-TW" altLang="en-US" sz="1200" dirty="0">
+                <a:solidFill>
+                  <a:schemeClr val="tx2"/>
+                </a:solidFill>
+              </a:rPr>
+              <a:t>兩種都能用，差別只在預設工作區不能另外設每月上限。你的組織沒有付款方式，附送額度本身就是上限，用完只會暫停。</a:t>
+            </a:r>
+            <a:endParaRPr lang="zh-TW" sz="1200" dirty="0"/>
+          </a:p>
+        </p:txBody>
+      </p:sp>
+      <p:sp>
+        <p:nvSpPr>
+          <p:cNvPr id="55" name="marker-4"/>
           <p:cNvSpPr/>
           <p:nvPr/>
         </p:nvSpPr>
         <p:spPr>
           <a:xfrm>
-            <a:off x="2560320" y="5248656"/>
-            <a:ext cx="3291840" cy="310896"/>
-          </a:xfrm>
-          <a:prstGeom prst="roundRect">
-            <a:avLst>
-              <a:gd name="adj" fmla="val 11765"/>
-            </a:avLst>
-          </a:prstGeom>
-          <a:solidFill>
-            <a:schemeClr val="accent4"/>
-          </a:solidFill>
-          <a:ln w="25400">
-            <a:solidFill>
-              <a:schemeClr val="accent3"/>
-            </a:solidFill>
-            <a:prstDash val="solid"/>
-          </a:ln>
-        </p:spPr>
-      </p:sp>
-      <p:sp>
-        <p:nvSpPr>
-          <p:cNvPr id="44" name="Text 42"/>
-          <p:cNvSpPr txBox="1"/>
-          <p:nvPr/>
-        </p:nvSpPr>
-        <p:spPr>
-          <a:xfrm>
-            <a:off x="2651760" y="5248656"/>
-            <a:ext cx="3108960" cy="310896"/>
-          </a:xfrm>
-          <a:prstGeom prst="rect">
-            <a:avLst/>
-          </a:prstGeom>
-          <a:noFill/>
-          <a:ln/>
-        </p:spPr>
-        <p:txBody>
-          <a:bodyPr wrap="square" lIns="0" tIns="0" rIns="0" bIns="0" rtlCol="0" anchor="ctr"/>
-          <a:lstStyle/>
-          <a:p>
-            <a:pPr indent="0" marL="0">
-              <a:buNone/>
-            </a:pPr>
-            <a:r>
-              <a:rPr lang="zh-TW" altLang="en-US" sz="1050" dirty="0">
-                <a:solidFill>
-                  <a:schemeClr val="tx1"/>
-                </a:solidFill>
-                <a:latin typeface="Consolas" pitchFamily="34" charset="0"/>
-                <a:ea typeface="Consolas" pitchFamily="34" charset="-122"/>
-                <a:cs typeface="Consolas" pitchFamily="34" charset="-120"/>
-              </a:rPr>
-              <a:t>sk-ant-api03-••••••••</a:t>
-            </a:r>
-            <a:endParaRPr lang="zh-TW" sz="1050" dirty="0"/>
-          </a:p>
-        </p:txBody>
-      </p:sp>
-      <p:sp>
-        <p:nvSpPr>
-          <p:cNvPr id="45" name="marker-4"/>
-          <p:cNvSpPr/>
-          <p:nvPr/>
-        </p:nvSpPr>
-        <p:spPr>
-          <a:xfrm>
-            <a:off x="5907024" y="5266944"/>
-            <a:ext cx="274320" cy="274320"/>
+            <a:off x="7452360" y="5276088"/>
+            <a:ext cx="292608" cy="292608"/>
           </a:xfrm>
           <a:prstGeom prst="ellipse">
             <a:avLst/>
@@ -9023,14 +9339,14 @@
       </p:sp>
       <p:sp>
         <p:nvSpPr>
-          <p:cNvPr id="46" name="marker-4-text"/>
-          <p:cNvSpPr txBox="1"/>
-          <p:nvPr/>
-        </p:nvSpPr>
-        <p:spPr>
-          <a:xfrm>
-            <a:off x="5907024" y="5266944"/>
-            <a:ext cx="274320" cy="274320"/>
+          <p:cNvPr id="56" name="marker-4-text"/>
+          <p:cNvSpPr txBox="1"/>
+          <p:nvPr/>
+        </p:nvSpPr>
+        <p:spPr>
+          <a:xfrm>
+            <a:off x="7452360" y="5276088"/>
+            <a:ext cx="292608" cy="292608"/>
           </a:xfrm>
           <a:prstGeom prst="rect">
             <a:avLst/>
@@ -9059,533 +9375,73 @@
       </p:sp>
       <p:sp>
         <p:nvSpPr>
-          <p:cNvPr id="47" name="marker-1"/>
-          <p:cNvSpPr/>
-          <p:nvPr/>
-        </p:nvSpPr>
-        <p:spPr>
-          <a:xfrm>
-            <a:off x="7452360" y="1472184"/>
-            <a:ext cx="292608" cy="292608"/>
-          </a:xfrm>
-          <a:prstGeom prst="ellipse">
-            <a:avLst/>
-          </a:prstGeom>
-          <a:solidFill>
-            <a:schemeClr val="accent1"/>
-          </a:solidFill>
-          <a:ln w="19050">
-            <a:solidFill>
-              <a:srgbClr val="FFFFFF"/>
-            </a:solidFill>
-            <a:prstDash val="solid"/>
-          </a:ln>
-        </p:spPr>
-      </p:sp>
-      <p:sp>
-        <p:nvSpPr>
-          <p:cNvPr id="48" name="marker-1-text"/>
-          <p:cNvSpPr txBox="1"/>
-          <p:nvPr/>
-        </p:nvSpPr>
-        <p:spPr>
-          <a:xfrm>
-            <a:off x="7452360" y="1472184"/>
-            <a:ext cx="292608" cy="292608"/>
-          </a:xfrm>
-          <a:prstGeom prst="rect">
-            <a:avLst/>
-          </a:prstGeom>
-          <a:noFill/>
-          <a:ln/>
-        </p:spPr>
-        <p:txBody>
-          <a:bodyPr wrap="square" lIns="0" tIns="0" rIns="0" bIns="0" rtlCol="0" anchor="ctr"/>
-          <a:lstStyle/>
-          <a:p>
-            <a:pPr algn="ctr" indent="0" marL="0">
-              <a:buNone/>
-            </a:pPr>
-            <a:r>
-              <a:rPr lang="zh-TW" altLang="en-US" sz="1200" b="1" dirty="0">
-                <a:solidFill>
-                  <a:schemeClr val="bg1"/>
-                </a:solidFill>
-              </a:rPr>
-              <a:t>1</a:t>
+          <p:cNvPr id="57" name="Text 55"/>
+          <p:cNvSpPr txBox="1"/>
+          <p:nvPr/>
+        </p:nvSpPr>
+        <p:spPr>
+          <a:xfrm>
+            <a:off x="7854696" y="5266944"/>
+            <a:ext cx="3788359" cy="252984"/>
+          </a:xfrm>
+          <a:prstGeom prst="rect">
+            <a:avLst/>
+          </a:prstGeom>
+          <a:noFill/>
+          <a:ln/>
+        </p:spPr>
+        <p:txBody>
+          <a:bodyPr wrap="square" lIns="0" tIns="0" rIns="0" bIns="0" rtlCol="0" anchor="t"/>
+          <a:lstStyle/>
+          <a:p>
+            <a:pPr indent="0" marL="0">
+              <a:buNone/>
+            </a:pPr>
+            <a:r>
+              <a:rPr lang="zh-TW" altLang="en-US" sz="1400" b="1" dirty="0">
+                <a:solidFill>
+                  <a:schemeClr val="tx1"/>
+                </a:solidFill>
+              </a:rPr>
+              <a:t>按「建立金鑰」，立刻複製 sk-ant- 開頭的金鑰</a:t>
+            </a:r>
+            <a:endParaRPr lang="zh-TW" sz="1400" dirty="0"/>
+          </a:p>
+        </p:txBody>
+      </p:sp>
+      <p:sp>
+        <p:nvSpPr>
+          <p:cNvPr id="58" name="Text 56"/>
+          <p:cNvSpPr txBox="1"/>
+          <p:nvPr/>
+        </p:nvSpPr>
+        <p:spPr>
+          <a:xfrm>
+            <a:off x="7854696" y="5574792"/>
+            <a:ext cx="3788359" cy="420624"/>
+          </a:xfrm>
+          <a:prstGeom prst="rect">
+            <a:avLst/>
+          </a:prstGeom>
+          <a:noFill/>
+          <a:ln/>
+        </p:spPr>
+        <p:txBody>
+          <a:bodyPr wrap="square" lIns="0" tIns="0" rIns="0" bIns="0" rtlCol="0" anchor="t"/>
+          <a:lstStyle/>
+          <a:p>
+            <a:pPr indent="0" marL="0">
+              <a:buNone/>
+            </a:pPr>
+            <a:r>
+              <a:rPr lang="zh-TW" altLang="en-US" sz="1200" dirty="0">
+                <a:solidFill>
+                  <a:schemeClr val="tx2"/>
+                </a:solidFill>
+              </a:rPr>
+              <a:t>只會顯示這一次。接法 1 貼進論憶（下一頁），接法 2 貼到 Vercel（B3）；弄丟了就刪掉重建一把。</a:t>
             </a:r>
             <a:endParaRPr lang="zh-TW" sz="1200" dirty="0"/>
-          </a:p>
-        </p:txBody>
-      </p:sp>
-      <p:sp>
-        <p:nvSpPr>
-          <p:cNvPr id="49" name="Text 47"/>
-          <p:cNvSpPr txBox="1"/>
-          <p:nvPr/>
-        </p:nvSpPr>
-        <p:spPr>
-          <a:xfrm>
-            <a:off x="7854696" y="1463040"/>
-            <a:ext cx="3788359" cy="244602"/>
-          </a:xfrm>
-          <a:prstGeom prst="rect">
-            <a:avLst/>
-          </a:prstGeom>
-          <a:noFill/>
-          <a:ln/>
-        </p:spPr>
-        <p:txBody>
-          <a:bodyPr wrap="square" lIns="0" tIns="0" rIns="0" bIns="0" rtlCol="0" anchor="t"/>
-          <a:lstStyle/>
-          <a:p>
-            <a:pPr indent="0" marL="0">
-              <a:buNone/>
-            </a:pPr>
-            <a:r>
-              <a:rPr lang="zh-TW" altLang="en-US" sz="1350" b="1" dirty="0">
-                <a:solidFill>
-                  <a:schemeClr val="tx1"/>
-                </a:solidFill>
-              </a:rPr>
-              <a:t>API keys → Create key</a:t>
-            </a:r>
-            <a:endParaRPr lang="zh-TW" sz="1350" dirty="0"/>
-          </a:p>
-        </p:txBody>
-      </p:sp>
-      <p:sp>
-        <p:nvSpPr>
-          <p:cNvPr id="50" name="Text 48"/>
-          <p:cNvSpPr txBox="1"/>
-          <p:nvPr/>
-        </p:nvSpPr>
-        <p:spPr>
-          <a:xfrm>
-            <a:off x="7854696" y="1762506"/>
-            <a:ext cx="3788359" cy="982218"/>
-          </a:xfrm>
-          <a:prstGeom prst="rect">
-            <a:avLst/>
-          </a:prstGeom>
-          <a:noFill/>
-          <a:ln/>
-        </p:spPr>
-        <p:txBody>
-          <a:bodyPr wrap="square" lIns="0" tIns="0" rIns="0" bIns="0" rtlCol="0" anchor="t"/>
-          <a:lstStyle/>
-          <a:p>
-            <a:pPr indent="0" marL="0">
-              <a:buNone/>
-            </a:pPr>
-            <a:r>
-              <a:rPr lang="zh-TW" altLang="en-US" sz="1150" dirty="0">
-                <a:solidFill>
-                  <a:schemeClr val="tx2"/>
-                </a:solidFill>
-              </a:rPr>
-              <a:t>先確認 Console 在 B1 綁定的組織。跳出「使用身分聯盟，您不需要 API 金鑰」時，按「使用 API 金鑰繼續」。接法 1 每台電腦建一把，用電腦命名（例如 lunyi-laptop）；接法 2 建一把 lunyi-vercel。Linked account 選你自己（個人金鑰）。</a:t>
-            </a:r>
-            <a:endParaRPr lang="zh-TW" sz="1150" dirty="0"/>
-          </a:p>
-        </p:txBody>
-      </p:sp>
-      <p:sp>
-        <p:nvSpPr>
-          <p:cNvPr id="51" name="marker-2"/>
-          <p:cNvSpPr/>
-          <p:nvPr/>
-        </p:nvSpPr>
-        <p:spPr>
-          <a:xfrm>
-            <a:off x="7452360" y="2918460"/>
-            <a:ext cx="292608" cy="292608"/>
-          </a:xfrm>
-          <a:prstGeom prst="ellipse">
-            <a:avLst/>
-          </a:prstGeom>
-          <a:solidFill>
-            <a:schemeClr val="accent1"/>
-          </a:solidFill>
-          <a:ln w="19050">
-            <a:solidFill>
-              <a:srgbClr val="FFFFFF"/>
-            </a:solidFill>
-            <a:prstDash val="solid"/>
-          </a:ln>
-        </p:spPr>
-      </p:sp>
-      <p:sp>
-        <p:nvSpPr>
-          <p:cNvPr id="52" name="marker-2-text"/>
-          <p:cNvSpPr txBox="1"/>
-          <p:nvPr/>
-        </p:nvSpPr>
-        <p:spPr>
-          <a:xfrm>
-            <a:off x="7452360" y="2918460"/>
-            <a:ext cx="292608" cy="292608"/>
-          </a:xfrm>
-          <a:prstGeom prst="rect">
-            <a:avLst/>
-          </a:prstGeom>
-          <a:noFill/>
-          <a:ln/>
-        </p:spPr>
-        <p:txBody>
-          <a:bodyPr wrap="square" lIns="0" tIns="0" rIns="0" bIns="0" rtlCol="0" anchor="ctr"/>
-          <a:lstStyle/>
-          <a:p>
-            <a:pPr algn="ctr" indent="0" marL="0">
-              <a:buNone/>
-            </a:pPr>
-            <a:r>
-              <a:rPr lang="zh-TW" altLang="en-US" sz="1200" b="1" dirty="0">
-                <a:solidFill>
-                  <a:schemeClr val="bg1"/>
-                </a:solidFill>
-              </a:rPr>
-              <a:t>2</a:t>
-            </a:r>
-            <a:endParaRPr lang="zh-TW" sz="1200" dirty="0"/>
-          </a:p>
-        </p:txBody>
-      </p:sp>
-      <p:sp>
-        <p:nvSpPr>
-          <p:cNvPr id="53" name="Text 51"/>
-          <p:cNvSpPr txBox="1"/>
-          <p:nvPr/>
-        </p:nvSpPr>
-        <p:spPr>
-          <a:xfrm>
-            <a:off x="7854696" y="2909316"/>
-            <a:ext cx="3788359" cy="244602"/>
-          </a:xfrm>
-          <a:prstGeom prst="rect">
-            <a:avLst/>
-          </a:prstGeom>
-          <a:noFill/>
-          <a:ln/>
-        </p:spPr>
-        <p:txBody>
-          <a:bodyPr wrap="square" lIns="0" tIns="0" rIns="0" bIns="0" rtlCol="0" anchor="t"/>
-          <a:lstStyle/>
-          <a:p>
-            <a:pPr indent="0" marL="0">
-              <a:buNone/>
-            </a:pPr>
-            <a:r>
-              <a:rPr lang="zh-TW" altLang="en-US" sz="1350" b="1" dirty="0">
-                <a:solidFill>
-                  <a:schemeClr val="tx1"/>
-                </a:solidFill>
-              </a:rPr>
-              <a:t>Workspace 選 lunyi</a:t>
-            </a:r>
-            <a:endParaRPr lang="zh-TW" sz="1350" dirty="0"/>
-          </a:p>
-        </p:txBody>
-      </p:sp>
-      <p:sp>
-        <p:nvSpPr>
-          <p:cNvPr id="54" name="Text 52"/>
-          <p:cNvSpPr txBox="1"/>
-          <p:nvPr/>
-        </p:nvSpPr>
-        <p:spPr>
-          <a:xfrm>
-            <a:off x="7854696" y="3208782"/>
-            <a:ext cx="3788359" cy="789432"/>
-          </a:xfrm>
-          <a:prstGeom prst="rect">
-            <a:avLst/>
-          </a:prstGeom>
-          <a:noFill/>
-          <a:ln/>
-        </p:spPr>
-        <p:txBody>
-          <a:bodyPr wrap="square" lIns="0" tIns="0" rIns="0" bIns="0" rtlCol="0" anchor="t"/>
-          <a:lstStyle/>
-          <a:p>
-            <a:pPr indent="0" marL="0">
-              <a:buNone/>
-            </a:pPr>
-            <a:r>
-              <a:rPr lang="zh-TW" altLang="en-US" sz="1150" dirty="0">
-                <a:solidFill>
-                  <a:schemeClr val="tx2"/>
-                </a:solidFill>
-              </a:rPr>
-              <a:t>沒選工作區的金鑰會被拒絕：接法 1 儲存時顯示「這把金鑰沒有綁定 workspace」，接法 2 顯示「not scoped to a workspace」。表單裡沒有這一欄時，先在 API keys 頁上方的工作區選單選 lunyi，再按 Create key。</a:t>
-            </a:r>
-            <a:endParaRPr lang="zh-TW" sz="1150" dirty="0"/>
-          </a:p>
-        </p:txBody>
-      </p:sp>
-      <p:sp>
-        <p:nvSpPr>
-          <p:cNvPr id="55" name="marker-3"/>
-          <p:cNvSpPr/>
-          <p:nvPr/>
-        </p:nvSpPr>
-        <p:spPr>
-          <a:xfrm>
-            <a:off x="7452360" y="4171950"/>
-            <a:ext cx="292608" cy="292608"/>
-          </a:xfrm>
-          <a:prstGeom prst="ellipse">
-            <a:avLst/>
-          </a:prstGeom>
-          <a:solidFill>
-            <a:schemeClr val="accent1"/>
-          </a:solidFill>
-          <a:ln w="19050">
-            <a:solidFill>
-              <a:srgbClr val="FFFFFF"/>
-            </a:solidFill>
-            <a:prstDash val="solid"/>
-          </a:ln>
-        </p:spPr>
-      </p:sp>
-      <p:sp>
-        <p:nvSpPr>
-          <p:cNvPr id="56" name="marker-3-text"/>
-          <p:cNvSpPr txBox="1"/>
-          <p:nvPr/>
-        </p:nvSpPr>
-        <p:spPr>
-          <a:xfrm>
-            <a:off x="7452360" y="4171950"/>
-            <a:ext cx="292608" cy="292608"/>
-          </a:xfrm>
-          <a:prstGeom prst="rect">
-            <a:avLst/>
-          </a:prstGeom>
-          <a:noFill/>
-          <a:ln/>
-        </p:spPr>
-        <p:txBody>
-          <a:bodyPr wrap="square" lIns="0" tIns="0" rIns="0" bIns="0" rtlCol="0" anchor="ctr"/>
-          <a:lstStyle/>
-          <a:p>
-            <a:pPr algn="ctr" indent="0" marL="0">
-              <a:buNone/>
-            </a:pPr>
-            <a:r>
-              <a:rPr lang="zh-TW" altLang="en-US" sz="1200" b="1" dirty="0">
-                <a:solidFill>
-                  <a:schemeClr val="bg1"/>
-                </a:solidFill>
-              </a:rPr>
-              <a:t>3</a:t>
-            </a:r>
-            <a:endParaRPr lang="zh-TW" sz="1200" dirty="0"/>
-          </a:p>
-        </p:txBody>
-      </p:sp>
-      <p:sp>
-        <p:nvSpPr>
-          <p:cNvPr id="57" name="Text 55"/>
-          <p:cNvSpPr txBox="1"/>
-          <p:nvPr/>
-        </p:nvSpPr>
-        <p:spPr>
-          <a:xfrm>
-            <a:off x="7854696" y="4162806"/>
-            <a:ext cx="3788359" cy="244602"/>
-          </a:xfrm>
-          <a:prstGeom prst="rect">
-            <a:avLst/>
-          </a:prstGeom>
-          <a:noFill/>
-          <a:ln/>
-        </p:spPr>
-        <p:txBody>
-          <a:bodyPr wrap="square" lIns="0" tIns="0" rIns="0" bIns="0" rtlCol="0" anchor="t"/>
-          <a:lstStyle/>
-          <a:p>
-            <a:pPr indent="0" marL="0">
-              <a:buNone/>
-            </a:pPr>
-            <a:r>
-              <a:rPr lang="zh-TW" altLang="en-US" sz="1350" b="1" dirty="0">
-                <a:solidFill>
-                  <a:schemeClr val="tx1"/>
-                </a:solidFill>
-              </a:rPr>
-              <a:t>Expiration 選 Never</a:t>
-            </a:r>
-            <a:endParaRPr lang="zh-TW" sz="1350" dirty="0"/>
-          </a:p>
-        </p:txBody>
-      </p:sp>
-      <p:sp>
-        <p:nvSpPr>
-          <p:cNvPr id="58" name="Text 56"/>
-          <p:cNvSpPr txBox="1"/>
-          <p:nvPr/>
-        </p:nvSpPr>
-        <p:spPr>
-          <a:xfrm>
-            <a:off x="7854696" y="4462272"/>
-            <a:ext cx="3788359" cy="403860"/>
-          </a:xfrm>
-          <a:prstGeom prst="rect">
-            <a:avLst/>
-          </a:prstGeom>
-          <a:noFill/>
-          <a:ln/>
-        </p:spPr>
-        <p:txBody>
-          <a:bodyPr wrap="square" lIns="0" tIns="0" rIns="0" bIns="0" rtlCol="0" anchor="t"/>
-          <a:lstStyle/>
-          <a:p>
-            <a:pPr indent="0" marL="0">
-              <a:buNone/>
-            </a:pPr>
-            <a:r>
-              <a:rPr lang="zh-TW" altLang="en-US" sz="1150" dirty="0">
-                <a:solidFill>
-                  <a:schemeClr val="tx2"/>
-                </a:solidFill>
-              </a:rPr>
-              <a:t>或選長一點的期限並記下日期。到期後網站的 AI 會停止，而且期限建立後不能改。</a:t>
-            </a:r>
-            <a:endParaRPr lang="zh-TW" sz="1150" dirty="0"/>
-          </a:p>
-        </p:txBody>
-      </p:sp>
-      <p:sp>
-        <p:nvSpPr>
-          <p:cNvPr id="59" name="marker-4"/>
-          <p:cNvSpPr/>
-          <p:nvPr/>
-        </p:nvSpPr>
-        <p:spPr>
-          <a:xfrm>
-            <a:off x="7452360" y="5039868"/>
-            <a:ext cx="292608" cy="292608"/>
-          </a:xfrm>
-          <a:prstGeom prst="ellipse">
-            <a:avLst/>
-          </a:prstGeom>
-          <a:solidFill>
-            <a:schemeClr val="accent1"/>
-          </a:solidFill>
-          <a:ln w="19050">
-            <a:solidFill>
-              <a:srgbClr val="FFFFFF"/>
-            </a:solidFill>
-            <a:prstDash val="solid"/>
-          </a:ln>
-        </p:spPr>
-      </p:sp>
-      <p:sp>
-        <p:nvSpPr>
-          <p:cNvPr id="60" name="marker-4-text"/>
-          <p:cNvSpPr txBox="1"/>
-          <p:nvPr/>
-        </p:nvSpPr>
-        <p:spPr>
-          <a:xfrm>
-            <a:off x="7452360" y="5039868"/>
-            <a:ext cx="292608" cy="292608"/>
-          </a:xfrm>
-          <a:prstGeom prst="rect">
-            <a:avLst/>
-          </a:prstGeom>
-          <a:noFill/>
-          <a:ln/>
-        </p:spPr>
-        <p:txBody>
-          <a:bodyPr wrap="square" lIns="0" tIns="0" rIns="0" bIns="0" rtlCol="0" anchor="ctr"/>
-          <a:lstStyle/>
-          <a:p>
-            <a:pPr algn="ctr" indent="0" marL="0">
-              <a:buNone/>
-            </a:pPr>
-            <a:r>
-              <a:rPr lang="zh-TW" altLang="en-US" sz="1200" b="1" dirty="0">
-                <a:solidFill>
-                  <a:schemeClr val="bg1"/>
-                </a:solidFill>
-              </a:rPr>
-              <a:t>4</a:t>
-            </a:r>
-            <a:endParaRPr lang="zh-TW" sz="1200" dirty="0"/>
-          </a:p>
-        </p:txBody>
-      </p:sp>
-      <p:sp>
-        <p:nvSpPr>
-          <p:cNvPr id="61" name="Text 59"/>
-          <p:cNvSpPr txBox="1"/>
-          <p:nvPr/>
-        </p:nvSpPr>
-        <p:spPr>
-          <a:xfrm>
-            <a:off x="7854696" y="5030724"/>
-            <a:ext cx="3788359" cy="244602"/>
-          </a:xfrm>
-          <a:prstGeom prst="rect">
-            <a:avLst/>
-          </a:prstGeom>
-          <a:noFill/>
-          <a:ln/>
-        </p:spPr>
-        <p:txBody>
-          <a:bodyPr wrap="square" lIns="0" tIns="0" rIns="0" bIns="0" rtlCol="0" anchor="t"/>
-          <a:lstStyle/>
-          <a:p>
-            <a:pPr indent="0" marL="0">
-              <a:buNone/>
-            </a:pPr>
-            <a:r>
-              <a:rPr lang="zh-TW" altLang="en-US" sz="1350" b="1" dirty="0">
-                <a:solidFill>
-                  <a:schemeClr val="tx1"/>
-                </a:solidFill>
-              </a:rPr>
-              <a:t>立刻複製 sk-ant- 開頭的金鑰</a:t>
-            </a:r>
-            <a:endParaRPr lang="zh-TW" sz="1350" dirty="0"/>
-          </a:p>
-        </p:txBody>
-      </p:sp>
-      <p:sp>
-        <p:nvSpPr>
-          <p:cNvPr id="62" name="Text 60"/>
-          <p:cNvSpPr txBox="1"/>
-          <p:nvPr/>
-        </p:nvSpPr>
-        <p:spPr>
-          <a:xfrm>
-            <a:off x="7854696" y="5330190"/>
-            <a:ext cx="3788359" cy="403860"/>
-          </a:xfrm>
-          <a:prstGeom prst="rect">
-            <a:avLst/>
-          </a:prstGeom>
-          <a:noFill/>
-          <a:ln/>
-        </p:spPr>
-        <p:txBody>
-          <a:bodyPr wrap="square" lIns="0" tIns="0" rIns="0" bIns="0" rtlCol="0" anchor="t"/>
-          <a:lstStyle/>
-          <a:p>
-            <a:pPr indent="0" marL="0">
-              <a:buNone/>
-            </a:pPr>
-            <a:r>
-              <a:rPr lang="zh-TW" altLang="en-US" sz="1150" dirty="0">
-                <a:solidFill>
-                  <a:schemeClr val="tx2"/>
-                </a:solidFill>
-              </a:rPr>
-              <a:t>只會顯示這一次。接法 1 貼進論憶（下一頁），接法 2 貼到 Vercel（B3）；弄丟了就刪掉重建一把。</a:t>
-            </a:r>
-            <a:endParaRPr lang="zh-TW" sz="1150" dirty="0"/>
           </a:p>
         </p:txBody>
       </p:sp>
@@ -22459,7 +22315,7 @@
                             <a:schemeClr val="tx1"/>
                           </a:solidFill>
                         </a:rPr>
-                        <a:t>B2 重建金鑰並選 lunyi；接法 1 到「進階」貼上新金鑰，接法 2 在 B3 換掉後 Redeploy</a:t>
+                        <a:t>B2 重建金鑰並在「範圍」選一個工作區；接法 1 到「進階」貼上新金鑰，接法 2 在 B3 換掉後 Redeploy</a:t>
                       </a:r>
                       <a:endParaRPr lang="zh-TW" sz="1000" dirty="0"/>
                     </a:p>
@@ -23906,7 +23762,7 @@
                   <a:schemeClr val="tx1"/>
                 </a:solidFill>
               </a:rPr>
-              <a:t>金鑰選工作區 lunyi，期限 Never</a:t>
+              <a:t>金鑰範圍選 lunyi（或預設工作區），期限「永不」</a:t>
             </a:r>
             <a:endParaRPr lang="zh-TW" sz="1300" dirty="0"/>
           </a:p>
